--- a/presentations/out/Укусы и ужаливания.pptx
+++ b/presentations/out/Укусы и ужаливания.pptx
@@ -14,6 +14,10 @@
     <p:sldId id="262" r:id="rId13"/>
     <p:sldId id="263" r:id="rId14"/>
     <p:sldId id="264" r:id="rId15"/>
+    <p:sldId id="265" r:id="rId16"/>
+    <p:sldId id="266" r:id="rId17"/>
+    <p:sldId id="267" r:id="rId18"/>
+    <p:sldId id="268" r:id="rId19"/>
   </p:sldIdLst>
   <p:sldSz cx="12191695" cy="6858000" type="screen4x3"/>
   <p:notesSz cx="6858000" cy="9144000"/>
@@ -3351,6 +3355,1806 @@
 </p:sld>
 </file>
 
+<file path=ppt/slides/slide10.xml><?xml version="1.0" encoding="utf-8"?>
+<p:sld xmlns:a="http://schemas.openxmlformats.org/drawingml/2006/main" xmlns:p="http://schemas.openxmlformats.org/presentationml/2006/main" xmlns:r="http://schemas.openxmlformats.org/officeDocument/2006/relationships">
+  <p:cSld>
+    <p:spTree>
+      <p:nvGrpSpPr>
+        <p:cNvPr id="1" name=""/>
+        <p:cNvGrpSpPr/>
+        <p:nvPr/>
+      </p:nvGrpSpPr>
+      <p:grpSpPr/>
+      <p:sp>
+        <p:nvSpPr>
+          <p:cNvPr id="2" name="Rectangle 1"/>
+          <p:cNvSpPr/>
+          <p:nvPr/>
+        </p:nvSpPr>
+        <p:spPr>
+          <a:xfrm>
+            <a:off x="0" y="0"/>
+            <a:ext cx="12191695" cy="6858000"/>
+          </a:xfrm>
+          <a:prstGeom prst="rect">
+            <a:avLst/>
+          </a:prstGeom>
+          <a:solidFill>
+            <a:srgbClr val="FFFFFF"/>
+          </a:solidFill>
+          <a:ln>
+            <a:noFill/>
+          </a:ln>
+        </p:spPr>
+        <p:style>
+          <a:lnRef idx="1">
+            <a:schemeClr val="accent1"/>
+          </a:lnRef>
+          <a:fillRef idx="3">
+            <a:schemeClr val="accent1"/>
+          </a:fillRef>
+          <a:effectRef idx="2">
+            <a:schemeClr val="accent1"/>
+          </a:effectRef>
+          <a:fontRef idx="minor">
+            <a:schemeClr val="lt1"/>
+          </a:fontRef>
+        </p:style>
+        <p:txBody>
+          <a:bodyPr rtlCol="0" anchor="ctr"/>
+          <a:lstStyle/>
+          <a:p>
+            <a:pPr algn="ctr"/>
+          </a:p>
+        </p:txBody>
+      </p:sp>
+      <p:sp>
+        <p:nvSpPr>
+          <p:cNvPr id="3" name="TextBox 2"/>
+          <p:cNvSpPr txBox="1"/>
+          <p:nvPr/>
+        </p:nvSpPr>
+        <p:spPr>
+          <a:xfrm>
+            <a:off x="700000" y="250000"/>
+            <a:ext cx="11200000" cy="550000"/>
+          </a:xfrm>
+          <a:prstGeom prst="rect">
+            <a:avLst/>
+          </a:prstGeom>
+          <a:noFill/>
+        </p:spPr>
+        <p:txBody>
+          <a:bodyPr wrap="square" anchor="t">
+            <a:spAutoFit/>
+          </a:bodyPr>
+          <a:lstStyle/>
+          <a:p>
+            <a:pPr algn="l"/>
+            <a:r>
+              <a:rPr sz="2200" b="1">
+                <a:solidFill>
+                  <a:srgbClr val="333333"/>
+                </a:solidFill>
+                <a:latin typeface="Open Sans"/>
+                <a:ea typeface="Open Sans"/>
+                <a:cs typeface="Open Sans"/>
+              </a:rPr>
+              <a:t>ПРИЗНАКИ ОПАСНОГО УХУДШЕНИЯ</a:t>
+            </a:r>
+          </a:p>
+        </p:txBody>
+      </p:sp>
+      <p:sp>
+        <p:nvSpPr>
+          <p:cNvPr id="4" name="Rectangle 3"/>
+          <p:cNvSpPr/>
+          <p:nvPr/>
+        </p:nvSpPr>
+        <p:spPr>
+          <a:xfrm>
+            <a:off x="700000" y="850000"/>
+            <a:ext cx="9000000" cy="28000"/>
+          </a:xfrm>
+          <a:prstGeom prst="rect">
+            <a:avLst/>
+          </a:prstGeom>
+          <a:solidFill>
+            <a:srgbClr val="555555"/>
+          </a:solidFill>
+          <a:ln>
+            <a:noFill/>
+          </a:ln>
+        </p:spPr>
+        <p:style>
+          <a:lnRef idx="1">
+            <a:schemeClr val="accent1"/>
+          </a:lnRef>
+          <a:fillRef idx="3">
+            <a:schemeClr val="accent1"/>
+          </a:fillRef>
+          <a:effectRef idx="2">
+            <a:schemeClr val="accent1"/>
+          </a:effectRef>
+          <a:fontRef idx="minor">
+            <a:schemeClr val="lt1"/>
+          </a:fontRef>
+        </p:style>
+        <p:txBody>
+          <a:bodyPr rtlCol="0" anchor="ctr"/>
+          <a:lstStyle/>
+          <a:p>
+            <a:pPr algn="ctr"/>
+          </a:p>
+        </p:txBody>
+      </p:sp>
+      <p:sp>
+        <p:nvSpPr>
+          <p:cNvPr id="5" name="TextBox 4"/>
+          <p:cNvSpPr txBox="1"/>
+          <p:nvPr/>
+        </p:nvSpPr>
+        <p:spPr>
+          <a:xfrm>
+            <a:off x="700000" y="920000"/>
+            <a:ext cx="11000000" cy="350000"/>
+          </a:xfrm>
+          <a:prstGeom prst="rect">
+            <a:avLst/>
+          </a:prstGeom>
+          <a:noFill/>
+        </p:spPr>
+        <p:txBody>
+          <a:bodyPr wrap="square" anchor="t">
+            <a:spAutoFit/>
+          </a:bodyPr>
+          <a:lstStyle/>
+          <a:p>
+            <a:pPr algn="l"/>
+            <a:r>
+              <a:rPr sz="1200" b="0">
+                <a:solidFill>
+                  <a:srgbClr val="666666"/>
+                </a:solidFill>
+                <a:latin typeface="Open Sans"/>
+                <a:ea typeface="Open Sans"/>
+                <a:cs typeface="Open Sans"/>
+              </a:rPr>
+              <a:t>Оказание первой помощи при травмах, ранениях и поражениях, прочих состояниях</a:t>
+            </a:r>
+          </a:p>
+        </p:txBody>
+      </p:sp>
+      <p:sp>
+        <p:nvSpPr>
+          <p:cNvPr id="6" name="Rectangle 5"/>
+          <p:cNvSpPr/>
+          <p:nvPr/>
+        </p:nvSpPr>
+        <p:spPr>
+          <a:xfrm>
+            <a:off x="0" y="2800000"/>
+            <a:ext cx="420000" cy="420000"/>
+          </a:xfrm>
+          <a:prstGeom prst="rect">
+            <a:avLst/>
+          </a:prstGeom>
+          <a:solidFill>
+            <a:srgbClr val="555555"/>
+          </a:solidFill>
+          <a:ln>
+            <a:noFill/>
+          </a:ln>
+        </p:spPr>
+        <p:style>
+          <a:lnRef idx="1">
+            <a:schemeClr val="accent1"/>
+          </a:lnRef>
+          <a:fillRef idx="3">
+            <a:schemeClr val="accent1"/>
+          </a:fillRef>
+          <a:effectRef idx="2">
+            <a:schemeClr val="accent1"/>
+          </a:effectRef>
+          <a:fontRef idx="minor">
+            <a:schemeClr val="lt1"/>
+          </a:fontRef>
+        </p:style>
+        <p:txBody>
+          <a:bodyPr rtlCol="0" anchor="ctr"/>
+          <a:lstStyle/>
+          <a:p>
+            <a:pPr algn="ctr"/>
+          </a:p>
+        </p:txBody>
+      </p:sp>
+      <p:sp>
+        <p:nvSpPr>
+          <p:cNvPr id="7" name="TextBox 6"/>
+          <p:cNvSpPr txBox="1"/>
+          <p:nvPr/>
+        </p:nvSpPr>
+        <p:spPr>
+          <a:xfrm>
+            <a:off x="0" y="2800000"/>
+            <a:ext cx="420000" cy="420000"/>
+          </a:xfrm>
+          <a:prstGeom prst="rect">
+            <a:avLst/>
+          </a:prstGeom>
+          <a:noFill/>
+        </p:spPr>
+        <p:txBody>
+          <a:bodyPr wrap="square" anchor="ctr">
+            <a:spAutoFit/>
+          </a:bodyPr>
+          <a:lstStyle/>
+          <a:p>
+            <a:pPr algn="ctr"/>
+            <a:r>
+              <a:rPr sz="1400" b="1">
+                <a:solidFill>
+                  <a:srgbClr val="FFFFFF"/>
+                </a:solidFill>
+                <a:latin typeface="Open Sans"/>
+                <a:ea typeface="Open Sans"/>
+                <a:cs typeface="Open Sans"/>
+              </a:rPr>
+              <a:t>10</a:t>
+            </a:r>
+          </a:p>
+        </p:txBody>
+      </p:sp>
+      <p:sp>
+        <p:nvSpPr>
+          <p:cNvPr id="8" name="TextBox 7"/>
+          <p:cNvSpPr txBox="1"/>
+          <p:nvPr/>
+        </p:nvSpPr>
+        <p:spPr>
+          <a:xfrm>
+            <a:off x="700000" y="1450000"/>
+            <a:ext cx="11000000" cy="4000000"/>
+          </a:xfrm>
+          <a:prstGeom prst="rect">
+            <a:avLst/>
+          </a:prstGeom>
+          <a:noFill/>
+        </p:spPr>
+        <p:txBody>
+          <a:bodyPr wrap="square">
+            <a:spAutoFit/>
+          </a:bodyPr>
+          <a:lstStyle/>
+          <a:p>
+            <a:pPr algn="l">
+              <a:spcAft>
+                <a:spcPts val="800"/>
+              </a:spcAft>
+            </a:pPr>
+            <a:r>
+              <a:rPr sz="1400" b="1">
+                <a:solidFill>
+                  <a:srgbClr val="CC0000"/>
+                </a:solidFill>
+                <a:latin typeface="Open Sans"/>
+                <a:ea typeface="Open Sans"/>
+                <a:cs typeface="Open Sans"/>
+              </a:rPr>
+              <a:t>•  Быстро нарастающий отек лица, губ, языка или шеи</a:t>
+            </a:r>
+          </a:p>
+          <a:p>
+            <a:pPr algn="l">
+              <a:spcAft>
+                <a:spcPts val="800"/>
+              </a:spcAft>
+            </a:pPr>
+            <a:r>
+              <a:rPr sz="1400" b="1">
+                <a:solidFill>
+                  <a:srgbClr val="CC0000"/>
+                </a:solidFill>
+                <a:latin typeface="Open Sans"/>
+                <a:ea typeface="Open Sans"/>
+                <a:cs typeface="Open Sans"/>
+              </a:rPr>
+              <a:t>•  Затрудненное, шумное дыхание или невозможность говорить</a:t>
+            </a:r>
+          </a:p>
+          <a:p>
+            <a:pPr algn="l">
+              <a:spcAft>
+                <a:spcPts val="800"/>
+              </a:spcAft>
+            </a:pPr>
+            <a:r>
+              <a:rPr sz="1400" b="1">
+                <a:solidFill>
+                  <a:srgbClr val="CC0000"/>
+                </a:solidFill>
+                <a:latin typeface="Open Sans"/>
+                <a:ea typeface="Open Sans"/>
+                <a:cs typeface="Open Sans"/>
+              </a:rPr>
+              <a:t>•  Резкая слабость, бледность, холодный пот и потеря сознания</a:t>
+            </a:r>
+          </a:p>
+          <a:p>
+            <a:pPr algn="l">
+              <a:spcAft>
+                <a:spcPts val="800"/>
+              </a:spcAft>
+            </a:pPr>
+            <a:r>
+              <a:rPr sz="1400" b="1">
+                <a:solidFill>
+                  <a:srgbClr val="CC0000"/>
+                </a:solidFill>
+                <a:latin typeface="Open Sans"/>
+                <a:ea typeface="Open Sans"/>
+                <a:cs typeface="Open Sans"/>
+              </a:rPr>
+              <a:t>•  Повторная рвота, судороги или быстро распространяющаяся сыпь</a:t>
+            </a:r>
+          </a:p>
+          <a:p>
+            <a:pPr algn="l">
+              <a:spcAft>
+                <a:spcPts val="800"/>
+              </a:spcAft>
+            </a:pPr>
+            <a:r>
+              <a:rPr sz="1400" b="1">
+                <a:solidFill>
+                  <a:srgbClr val="CC0000"/>
+                </a:solidFill>
+                <a:latin typeface="Open Sans"/>
+                <a:ea typeface="Open Sans"/>
+                <a:cs typeface="Open Sans"/>
+              </a:rPr>
+              <a:t>•  Отсутствие нормального дыхания</a:t>
+            </a:r>
+          </a:p>
+        </p:txBody>
+      </p:sp>
+      <p:sp>
+        <p:nvSpPr>
+          <p:cNvPr id="9" name="Rounded Rectangle 8"/>
+          <p:cNvSpPr/>
+          <p:nvPr/>
+        </p:nvSpPr>
+        <p:spPr>
+          <a:xfrm>
+            <a:off x="700000" y="5600000"/>
+            <a:ext cx="11000000" cy="1000000"/>
+          </a:xfrm>
+          <a:prstGeom prst="roundRect">
+            <a:avLst/>
+          </a:prstGeom>
+          <a:solidFill>
+            <a:srgbClr val="F5F0E1"/>
+          </a:solidFill>
+          <a:ln>
+            <a:noFill/>
+          </a:ln>
+        </p:spPr>
+        <p:style>
+          <a:lnRef idx="1">
+            <a:schemeClr val="accent1"/>
+          </a:lnRef>
+          <a:fillRef idx="3">
+            <a:schemeClr val="accent1"/>
+          </a:fillRef>
+          <a:effectRef idx="2">
+            <a:schemeClr val="accent1"/>
+          </a:effectRef>
+          <a:fontRef idx="minor">
+            <a:schemeClr val="lt1"/>
+          </a:fontRef>
+        </p:style>
+        <p:txBody>
+          <a:bodyPr rtlCol="0" anchor="ctr"/>
+          <a:lstStyle/>
+          <a:p>
+            <a:pPr algn="ctr"/>
+          </a:p>
+        </p:txBody>
+      </p:sp>
+      <p:sp>
+        <p:nvSpPr>
+          <p:cNvPr id="10" name="TextBox 9"/>
+          <p:cNvSpPr txBox="1"/>
+          <p:nvPr/>
+        </p:nvSpPr>
+        <p:spPr>
+          <a:xfrm>
+            <a:off x="950000" y="5800000"/>
+            <a:ext cx="10500000" cy="600000"/>
+          </a:xfrm>
+          <a:prstGeom prst="rect">
+            <a:avLst/>
+          </a:prstGeom>
+          <a:noFill/>
+        </p:spPr>
+        <p:txBody>
+          <a:bodyPr wrap="square" anchor="ctr">
+            <a:spAutoFit/>
+          </a:bodyPr>
+          <a:lstStyle/>
+          <a:p>
+            <a:pPr algn="l"/>
+            <a:r>
+              <a:rPr sz="1200" b="0">
+                <a:solidFill>
+                  <a:srgbClr val="333333"/>
+                </a:solidFill>
+                <a:latin typeface="Open Sans"/>
+                <a:ea typeface="Open Sans"/>
+                <a:cs typeface="Open Sans"/>
+              </a:rPr>
+              <a:t>Немедленно сообщите об ухудшении диспетчеру. При отсутствии нормального дыхания начинайте сердечно-легочную реанимацию.</a:t>
+            </a:r>
+          </a:p>
+        </p:txBody>
+      </p:sp>
+    </p:spTree>
+  </p:cSld>
+  <p:clrMapOvr>
+    <a:masterClrMapping/>
+  </p:clrMapOvr>
+</p:sld>
+</file>
+
+<file path=ppt/slides/slide11.xml><?xml version="1.0" encoding="utf-8"?>
+<p:sld xmlns:a="http://schemas.openxmlformats.org/drawingml/2006/main" xmlns:p="http://schemas.openxmlformats.org/presentationml/2006/main" xmlns:r="http://schemas.openxmlformats.org/officeDocument/2006/relationships">
+  <p:cSld>
+    <p:spTree>
+      <p:nvGrpSpPr>
+        <p:cNvPr id="1" name=""/>
+        <p:cNvGrpSpPr/>
+        <p:nvPr/>
+      </p:nvGrpSpPr>
+      <p:grpSpPr/>
+      <p:sp>
+        <p:nvSpPr>
+          <p:cNvPr id="2" name="Rectangle 1"/>
+          <p:cNvSpPr/>
+          <p:nvPr/>
+        </p:nvSpPr>
+        <p:spPr>
+          <a:xfrm>
+            <a:off x="0" y="0"/>
+            <a:ext cx="12191695" cy="6858000"/>
+          </a:xfrm>
+          <a:prstGeom prst="rect">
+            <a:avLst/>
+          </a:prstGeom>
+          <a:solidFill>
+            <a:srgbClr val="FFFFFF"/>
+          </a:solidFill>
+          <a:ln>
+            <a:noFill/>
+          </a:ln>
+        </p:spPr>
+        <p:style>
+          <a:lnRef idx="1">
+            <a:schemeClr val="accent1"/>
+          </a:lnRef>
+          <a:fillRef idx="3">
+            <a:schemeClr val="accent1"/>
+          </a:fillRef>
+          <a:effectRef idx="2">
+            <a:schemeClr val="accent1"/>
+          </a:effectRef>
+          <a:fontRef idx="minor">
+            <a:schemeClr val="lt1"/>
+          </a:fontRef>
+        </p:style>
+        <p:txBody>
+          <a:bodyPr rtlCol="0" anchor="ctr"/>
+          <a:lstStyle/>
+          <a:p>
+            <a:pPr algn="ctr"/>
+          </a:p>
+        </p:txBody>
+      </p:sp>
+      <p:sp>
+        <p:nvSpPr>
+          <p:cNvPr id="3" name="TextBox 2"/>
+          <p:cNvSpPr txBox="1"/>
+          <p:nvPr/>
+        </p:nvSpPr>
+        <p:spPr>
+          <a:xfrm>
+            <a:off x="700000" y="250000"/>
+            <a:ext cx="11200000" cy="550000"/>
+          </a:xfrm>
+          <a:prstGeom prst="rect">
+            <a:avLst/>
+          </a:prstGeom>
+          <a:noFill/>
+        </p:spPr>
+        <p:txBody>
+          <a:bodyPr wrap="square" anchor="t">
+            <a:spAutoFit/>
+          </a:bodyPr>
+          <a:lstStyle/>
+          <a:p>
+            <a:pPr algn="l"/>
+            <a:r>
+              <a:rPr sz="2200" b="1">
+                <a:solidFill>
+                  <a:srgbClr val="333333"/>
+                </a:solidFill>
+                <a:latin typeface="Open Sans"/>
+                <a:ea typeface="Open Sans"/>
+                <a:cs typeface="Open Sans"/>
+              </a:rPr>
+              <a:t>ГЛАВНОЕ ЗАПОМНИТЬ</a:t>
+            </a:r>
+          </a:p>
+        </p:txBody>
+      </p:sp>
+      <p:sp>
+        <p:nvSpPr>
+          <p:cNvPr id="4" name="Rectangle 3"/>
+          <p:cNvSpPr/>
+          <p:nvPr/>
+        </p:nvSpPr>
+        <p:spPr>
+          <a:xfrm>
+            <a:off x="700000" y="850000"/>
+            <a:ext cx="9000000" cy="28000"/>
+          </a:xfrm>
+          <a:prstGeom prst="rect">
+            <a:avLst/>
+          </a:prstGeom>
+          <a:solidFill>
+            <a:srgbClr val="555555"/>
+          </a:solidFill>
+          <a:ln>
+            <a:noFill/>
+          </a:ln>
+        </p:spPr>
+        <p:style>
+          <a:lnRef idx="1">
+            <a:schemeClr val="accent1"/>
+          </a:lnRef>
+          <a:fillRef idx="3">
+            <a:schemeClr val="accent1"/>
+          </a:fillRef>
+          <a:effectRef idx="2">
+            <a:schemeClr val="accent1"/>
+          </a:effectRef>
+          <a:fontRef idx="minor">
+            <a:schemeClr val="lt1"/>
+          </a:fontRef>
+        </p:style>
+        <p:txBody>
+          <a:bodyPr rtlCol="0" anchor="ctr"/>
+          <a:lstStyle/>
+          <a:p>
+            <a:pPr algn="ctr"/>
+          </a:p>
+        </p:txBody>
+      </p:sp>
+      <p:sp>
+        <p:nvSpPr>
+          <p:cNvPr id="5" name="TextBox 4"/>
+          <p:cNvSpPr txBox="1"/>
+          <p:nvPr/>
+        </p:nvSpPr>
+        <p:spPr>
+          <a:xfrm>
+            <a:off x="700000" y="920000"/>
+            <a:ext cx="11000000" cy="350000"/>
+          </a:xfrm>
+          <a:prstGeom prst="rect">
+            <a:avLst/>
+          </a:prstGeom>
+          <a:noFill/>
+        </p:spPr>
+        <p:txBody>
+          <a:bodyPr wrap="square" anchor="t">
+            <a:spAutoFit/>
+          </a:bodyPr>
+          <a:lstStyle/>
+          <a:p>
+            <a:pPr algn="l"/>
+            <a:r>
+              <a:rPr sz="1200" b="0">
+                <a:solidFill>
+                  <a:srgbClr val="666666"/>
+                </a:solidFill>
+                <a:latin typeface="Open Sans"/>
+                <a:ea typeface="Open Sans"/>
+                <a:cs typeface="Open Sans"/>
+              </a:rPr>
+              <a:t>Оказание первой помощи при травмах, ранениях и поражениях, прочих состояниях</a:t>
+            </a:r>
+          </a:p>
+        </p:txBody>
+      </p:sp>
+      <p:sp>
+        <p:nvSpPr>
+          <p:cNvPr id="6" name="Rectangle 5"/>
+          <p:cNvSpPr/>
+          <p:nvPr/>
+        </p:nvSpPr>
+        <p:spPr>
+          <a:xfrm>
+            <a:off x="0" y="2800000"/>
+            <a:ext cx="420000" cy="420000"/>
+          </a:xfrm>
+          <a:prstGeom prst="rect">
+            <a:avLst/>
+          </a:prstGeom>
+          <a:solidFill>
+            <a:srgbClr val="555555"/>
+          </a:solidFill>
+          <a:ln>
+            <a:noFill/>
+          </a:ln>
+        </p:spPr>
+        <p:style>
+          <a:lnRef idx="1">
+            <a:schemeClr val="accent1"/>
+          </a:lnRef>
+          <a:fillRef idx="3">
+            <a:schemeClr val="accent1"/>
+          </a:fillRef>
+          <a:effectRef idx="2">
+            <a:schemeClr val="accent1"/>
+          </a:effectRef>
+          <a:fontRef idx="minor">
+            <a:schemeClr val="lt1"/>
+          </a:fontRef>
+        </p:style>
+        <p:txBody>
+          <a:bodyPr rtlCol="0" anchor="ctr"/>
+          <a:lstStyle/>
+          <a:p>
+            <a:pPr algn="ctr"/>
+          </a:p>
+        </p:txBody>
+      </p:sp>
+      <p:sp>
+        <p:nvSpPr>
+          <p:cNvPr id="7" name="TextBox 6"/>
+          <p:cNvSpPr txBox="1"/>
+          <p:nvPr/>
+        </p:nvSpPr>
+        <p:spPr>
+          <a:xfrm>
+            <a:off x="0" y="2800000"/>
+            <a:ext cx="420000" cy="420000"/>
+          </a:xfrm>
+          <a:prstGeom prst="rect">
+            <a:avLst/>
+          </a:prstGeom>
+          <a:noFill/>
+        </p:spPr>
+        <p:txBody>
+          <a:bodyPr wrap="square" anchor="ctr">
+            <a:spAutoFit/>
+          </a:bodyPr>
+          <a:lstStyle/>
+          <a:p>
+            <a:pPr algn="ctr"/>
+            <a:r>
+              <a:rPr sz="1400" b="1">
+                <a:solidFill>
+                  <a:srgbClr val="FFFFFF"/>
+                </a:solidFill>
+                <a:latin typeface="Open Sans"/>
+                <a:ea typeface="Open Sans"/>
+                <a:cs typeface="Open Sans"/>
+              </a:rPr>
+              <a:t>11</a:t>
+            </a:r>
+          </a:p>
+        </p:txBody>
+      </p:sp>
+      <p:sp>
+        <p:nvSpPr>
+          <p:cNvPr id="8" name="Rectangle 7"/>
+          <p:cNvSpPr/>
+          <p:nvPr/>
+        </p:nvSpPr>
+        <p:spPr>
+          <a:xfrm>
+            <a:off x="700000" y="1450000"/>
+            <a:ext cx="11000000" cy="850000"/>
+          </a:xfrm>
+          <a:prstGeom prst="rect">
+            <a:avLst/>
+          </a:prstGeom>
+          <a:solidFill>
+            <a:srgbClr val="FFFFFF"/>
+          </a:solidFill>
+          <a:ln w="12700">
+            <a:solidFill>
+              <a:srgbClr val="999999"/>
+            </a:solidFill>
+          </a:ln>
+        </p:spPr>
+        <p:style>
+          <a:lnRef idx="1">
+            <a:schemeClr val="accent1"/>
+          </a:lnRef>
+          <a:fillRef idx="3">
+            <a:schemeClr val="accent1"/>
+          </a:fillRef>
+          <a:effectRef idx="2">
+            <a:schemeClr val="accent1"/>
+          </a:effectRef>
+          <a:fontRef idx="minor">
+            <a:schemeClr val="lt1"/>
+          </a:fontRef>
+        </p:style>
+        <p:txBody>
+          <a:bodyPr rtlCol="0" anchor="ctr"/>
+          <a:lstStyle/>
+          <a:p>
+            <a:pPr algn="ctr"/>
+          </a:p>
+        </p:txBody>
+      </p:sp>
+      <p:sp>
+        <p:nvSpPr>
+          <p:cNvPr id="9" name="Rectangle 8"/>
+          <p:cNvSpPr/>
+          <p:nvPr/>
+        </p:nvSpPr>
+        <p:spPr>
+          <a:xfrm>
+            <a:off x="700000" y="1450000"/>
+            <a:ext cx="90000" cy="850000"/>
+          </a:xfrm>
+          <a:prstGeom prst="rect">
+            <a:avLst/>
+          </a:prstGeom>
+          <a:solidFill>
+            <a:srgbClr val="CC0000"/>
+          </a:solidFill>
+          <a:ln>
+            <a:noFill/>
+          </a:ln>
+        </p:spPr>
+        <p:style>
+          <a:lnRef idx="1">
+            <a:schemeClr val="accent1"/>
+          </a:lnRef>
+          <a:fillRef idx="3">
+            <a:schemeClr val="accent1"/>
+          </a:fillRef>
+          <a:effectRef idx="2">
+            <a:schemeClr val="accent1"/>
+          </a:effectRef>
+          <a:fontRef idx="minor">
+            <a:schemeClr val="lt1"/>
+          </a:fontRef>
+        </p:style>
+        <p:txBody>
+          <a:bodyPr rtlCol="0" anchor="ctr"/>
+          <a:lstStyle/>
+          <a:p>
+            <a:pPr algn="ctr"/>
+          </a:p>
+        </p:txBody>
+      </p:sp>
+      <p:sp>
+        <p:nvSpPr>
+          <p:cNvPr id="10" name="TextBox 9"/>
+          <p:cNvSpPr txBox="1"/>
+          <p:nvPr/>
+        </p:nvSpPr>
+        <p:spPr>
+          <a:xfrm>
+            <a:off x="1000000" y="1530000"/>
+            <a:ext cx="10400000" cy="690000"/>
+          </a:xfrm>
+          <a:prstGeom prst="rect">
+            <a:avLst/>
+          </a:prstGeom>
+          <a:noFill/>
+        </p:spPr>
+        <p:txBody>
+          <a:bodyPr wrap="square" anchor="ctr">
+            <a:spAutoFit/>
+          </a:bodyPr>
+          <a:lstStyle/>
+          <a:p>
+            <a:pPr algn="l"/>
+            <a:r>
+              <a:rPr sz="1300" b="0">
+                <a:solidFill>
+                  <a:srgbClr val="333333"/>
+                </a:solidFill>
+                <a:latin typeface="Open Sans"/>
+                <a:ea typeface="Open Sans"/>
+                <a:cs typeface="Open Sans"/>
+              </a:rPr>
+              <a:t>Сначала устраните угрозу повторного укуса</a:t>
+            </a:r>
+          </a:p>
+        </p:txBody>
+      </p:sp>
+      <p:sp>
+        <p:nvSpPr>
+          <p:cNvPr id="11" name="Rectangle 10"/>
+          <p:cNvSpPr/>
+          <p:nvPr/>
+        </p:nvSpPr>
+        <p:spPr>
+          <a:xfrm>
+            <a:off x="700000" y="2380000"/>
+            <a:ext cx="11000000" cy="850000"/>
+          </a:xfrm>
+          <a:prstGeom prst="rect">
+            <a:avLst/>
+          </a:prstGeom>
+          <a:solidFill>
+            <a:srgbClr val="FFFFFF"/>
+          </a:solidFill>
+          <a:ln w="12700">
+            <a:solidFill>
+              <a:srgbClr val="999999"/>
+            </a:solidFill>
+          </a:ln>
+        </p:spPr>
+        <p:style>
+          <a:lnRef idx="1">
+            <a:schemeClr val="accent1"/>
+          </a:lnRef>
+          <a:fillRef idx="3">
+            <a:schemeClr val="accent1"/>
+          </a:fillRef>
+          <a:effectRef idx="2">
+            <a:schemeClr val="accent1"/>
+          </a:effectRef>
+          <a:fontRef idx="minor">
+            <a:schemeClr val="lt1"/>
+          </a:fontRef>
+        </p:style>
+        <p:txBody>
+          <a:bodyPr rtlCol="0" anchor="ctr"/>
+          <a:lstStyle/>
+          <a:p>
+            <a:pPr algn="ctr"/>
+          </a:p>
+        </p:txBody>
+      </p:sp>
+      <p:sp>
+        <p:nvSpPr>
+          <p:cNvPr id="12" name="Rectangle 11"/>
+          <p:cNvSpPr/>
+          <p:nvPr/>
+        </p:nvSpPr>
+        <p:spPr>
+          <a:xfrm>
+            <a:off x="700000" y="2380000"/>
+            <a:ext cx="90000" cy="850000"/>
+          </a:xfrm>
+          <a:prstGeom prst="rect">
+            <a:avLst/>
+          </a:prstGeom>
+          <a:solidFill>
+            <a:srgbClr val="CC0000"/>
+          </a:solidFill>
+          <a:ln>
+            <a:noFill/>
+          </a:ln>
+        </p:spPr>
+        <p:style>
+          <a:lnRef idx="1">
+            <a:schemeClr val="accent1"/>
+          </a:lnRef>
+          <a:fillRef idx="3">
+            <a:schemeClr val="accent1"/>
+          </a:fillRef>
+          <a:effectRef idx="2">
+            <a:schemeClr val="accent1"/>
+          </a:effectRef>
+          <a:fontRef idx="minor">
+            <a:schemeClr val="lt1"/>
+          </a:fontRef>
+        </p:style>
+        <p:txBody>
+          <a:bodyPr rtlCol="0" anchor="ctr"/>
+          <a:lstStyle/>
+          <a:p>
+            <a:pPr algn="ctr"/>
+          </a:p>
+        </p:txBody>
+      </p:sp>
+      <p:sp>
+        <p:nvSpPr>
+          <p:cNvPr id="13" name="TextBox 12"/>
+          <p:cNvSpPr txBox="1"/>
+          <p:nvPr/>
+        </p:nvSpPr>
+        <p:spPr>
+          <a:xfrm>
+            <a:off x="1000000" y="2460000"/>
+            <a:ext cx="10400000" cy="690000"/>
+          </a:xfrm>
+          <a:prstGeom prst="rect">
+            <a:avLst/>
+          </a:prstGeom>
+          <a:noFill/>
+        </p:spPr>
+        <p:txBody>
+          <a:bodyPr wrap="square" anchor="ctr">
+            <a:spAutoFit/>
+          </a:bodyPr>
+          <a:lstStyle/>
+          <a:p>
+            <a:pPr algn="l"/>
+            <a:r>
+              <a:rPr sz="1300" b="0">
+                <a:solidFill>
+                  <a:srgbClr val="333333"/>
+                </a:solidFill>
+                <a:latin typeface="Open Sans"/>
+                <a:ea typeface="Open Sans"/>
+                <a:cs typeface="Open Sans"/>
+              </a:rPr>
+              <a:t>Действуйте по общим принципам помощи при отравлении</a:t>
+            </a:r>
+          </a:p>
+        </p:txBody>
+      </p:sp>
+      <p:sp>
+        <p:nvSpPr>
+          <p:cNvPr id="14" name="Rectangle 13"/>
+          <p:cNvSpPr/>
+          <p:nvPr/>
+        </p:nvSpPr>
+        <p:spPr>
+          <a:xfrm>
+            <a:off x="700000" y="3310000"/>
+            <a:ext cx="11000000" cy="850000"/>
+          </a:xfrm>
+          <a:prstGeom prst="rect">
+            <a:avLst/>
+          </a:prstGeom>
+          <a:solidFill>
+            <a:srgbClr val="FFFFFF"/>
+          </a:solidFill>
+          <a:ln w="12700">
+            <a:solidFill>
+              <a:srgbClr val="999999"/>
+            </a:solidFill>
+          </a:ln>
+        </p:spPr>
+        <p:style>
+          <a:lnRef idx="1">
+            <a:schemeClr val="accent1"/>
+          </a:lnRef>
+          <a:fillRef idx="3">
+            <a:schemeClr val="accent1"/>
+          </a:fillRef>
+          <a:effectRef idx="2">
+            <a:schemeClr val="accent1"/>
+          </a:effectRef>
+          <a:fontRef idx="minor">
+            <a:schemeClr val="lt1"/>
+          </a:fontRef>
+        </p:style>
+        <p:txBody>
+          <a:bodyPr rtlCol="0" anchor="ctr"/>
+          <a:lstStyle/>
+          <a:p>
+            <a:pPr algn="ctr"/>
+          </a:p>
+        </p:txBody>
+      </p:sp>
+      <p:sp>
+        <p:nvSpPr>
+          <p:cNvPr id="15" name="Rectangle 14"/>
+          <p:cNvSpPr/>
+          <p:nvPr/>
+        </p:nvSpPr>
+        <p:spPr>
+          <a:xfrm>
+            <a:off x="700000" y="3310000"/>
+            <a:ext cx="90000" cy="850000"/>
+          </a:xfrm>
+          <a:prstGeom prst="rect">
+            <a:avLst/>
+          </a:prstGeom>
+          <a:solidFill>
+            <a:srgbClr val="CC0000"/>
+          </a:solidFill>
+          <a:ln>
+            <a:noFill/>
+          </a:ln>
+        </p:spPr>
+        <p:style>
+          <a:lnRef idx="1">
+            <a:schemeClr val="accent1"/>
+          </a:lnRef>
+          <a:fillRef idx="3">
+            <a:schemeClr val="accent1"/>
+          </a:fillRef>
+          <a:effectRef idx="2">
+            <a:schemeClr val="accent1"/>
+          </a:effectRef>
+          <a:fontRef idx="minor">
+            <a:schemeClr val="lt1"/>
+          </a:fontRef>
+        </p:style>
+        <p:txBody>
+          <a:bodyPr rtlCol="0" anchor="ctr"/>
+          <a:lstStyle/>
+          <a:p>
+            <a:pPr algn="ctr"/>
+          </a:p>
+        </p:txBody>
+      </p:sp>
+      <p:sp>
+        <p:nvSpPr>
+          <p:cNvPr id="16" name="TextBox 15"/>
+          <p:cNvSpPr txBox="1"/>
+          <p:nvPr/>
+        </p:nvSpPr>
+        <p:spPr>
+          <a:xfrm>
+            <a:off x="1000000" y="3390000"/>
+            <a:ext cx="10400000" cy="690000"/>
+          </a:xfrm>
+          <a:prstGeom prst="rect">
+            <a:avLst/>
+          </a:prstGeom>
+          <a:noFill/>
+        </p:spPr>
+        <p:txBody>
+          <a:bodyPr wrap="square" anchor="ctr">
+            <a:spAutoFit/>
+          </a:bodyPr>
+          <a:lstStyle/>
+          <a:p>
+            <a:pPr algn="l"/>
+            <a:r>
+              <a:rPr sz="1300" b="0">
+                <a:solidFill>
+                  <a:srgbClr val="333333"/>
+                </a:solidFill>
+                <a:latin typeface="Open Sans"/>
+                <a:ea typeface="Open Sans"/>
+                <a:cs typeface="Open Sans"/>
+              </a:rPr>
+              <a:t>Приложите холод через ткань</a:t>
+            </a:r>
+          </a:p>
+        </p:txBody>
+      </p:sp>
+      <p:sp>
+        <p:nvSpPr>
+          <p:cNvPr id="17" name="Rectangle 16"/>
+          <p:cNvSpPr/>
+          <p:nvPr/>
+        </p:nvSpPr>
+        <p:spPr>
+          <a:xfrm>
+            <a:off x="700000" y="4240000"/>
+            <a:ext cx="11000000" cy="850000"/>
+          </a:xfrm>
+          <a:prstGeom prst="rect">
+            <a:avLst/>
+          </a:prstGeom>
+          <a:solidFill>
+            <a:srgbClr val="FFFFFF"/>
+          </a:solidFill>
+          <a:ln w="12700">
+            <a:solidFill>
+              <a:srgbClr val="999999"/>
+            </a:solidFill>
+          </a:ln>
+        </p:spPr>
+        <p:style>
+          <a:lnRef idx="1">
+            <a:schemeClr val="accent1"/>
+          </a:lnRef>
+          <a:fillRef idx="3">
+            <a:schemeClr val="accent1"/>
+          </a:fillRef>
+          <a:effectRef idx="2">
+            <a:schemeClr val="accent1"/>
+          </a:effectRef>
+          <a:fontRef idx="minor">
+            <a:schemeClr val="lt1"/>
+          </a:fontRef>
+        </p:style>
+        <p:txBody>
+          <a:bodyPr rtlCol="0" anchor="ctr"/>
+          <a:lstStyle/>
+          <a:p>
+            <a:pPr algn="ctr"/>
+          </a:p>
+        </p:txBody>
+      </p:sp>
+      <p:sp>
+        <p:nvSpPr>
+          <p:cNvPr id="18" name="Rectangle 17"/>
+          <p:cNvSpPr/>
+          <p:nvPr/>
+        </p:nvSpPr>
+        <p:spPr>
+          <a:xfrm>
+            <a:off x="700000" y="4240000"/>
+            <a:ext cx="90000" cy="850000"/>
+          </a:xfrm>
+          <a:prstGeom prst="rect">
+            <a:avLst/>
+          </a:prstGeom>
+          <a:solidFill>
+            <a:srgbClr val="CC0000"/>
+          </a:solidFill>
+          <a:ln>
+            <a:noFill/>
+          </a:ln>
+        </p:spPr>
+        <p:style>
+          <a:lnRef idx="1">
+            <a:schemeClr val="accent1"/>
+          </a:lnRef>
+          <a:fillRef idx="3">
+            <a:schemeClr val="accent1"/>
+          </a:fillRef>
+          <a:effectRef idx="2">
+            <a:schemeClr val="accent1"/>
+          </a:effectRef>
+          <a:fontRef idx="minor">
+            <a:schemeClr val="lt1"/>
+          </a:fontRef>
+        </p:style>
+        <p:txBody>
+          <a:bodyPr rtlCol="0" anchor="ctr"/>
+          <a:lstStyle/>
+          <a:p>
+            <a:pPr algn="ctr"/>
+          </a:p>
+        </p:txBody>
+      </p:sp>
+      <p:sp>
+        <p:nvSpPr>
+          <p:cNvPr id="19" name="TextBox 18"/>
+          <p:cNvSpPr txBox="1"/>
+          <p:nvPr/>
+        </p:nvSpPr>
+        <p:spPr>
+          <a:xfrm>
+            <a:off x="1000000" y="4320000"/>
+            <a:ext cx="10400000" cy="690000"/>
+          </a:xfrm>
+          <a:prstGeom prst="rect">
+            <a:avLst/>
+          </a:prstGeom>
+          <a:noFill/>
+        </p:spPr>
+        <p:txBody>
+          <a:bodyPr wrap="square" anchor="ctr">
+            <a:spAutoFit/>
+          </a:bodyPr>
+          <a:lstStyle/>
+          <a:p>
+            <a:pPr algn="l"/>
+            <a:r>
+              <a:rPr sz="1300" b="0">
+                <a:solidFill>
+                  <a:srgbClr val="333333"/>
+                </a:solidFill>
+                <a:latin typeface="Open Sans"/>
+                <a:ea typeface="Open Sans"/>
+                <a:cs typeface="Open Sans"/>
+              </a:rPr>
+              <a:t>Ограничьте движения укушенной части</a:t>
+            </a:r>
+          </a:p>
+        </p:txBody>
+      </p:sp>
+      <p:sp>
+        <p:nvSpPr>
+          <p:cNvPr id="20" name="Rectangle 19"/>
+          <p:cNvSpPr/>
+          <p:nvPr/>
+        </p:nvSpPr>
+        <p:spPr>
+          <a:xfrm>
+            <a:off x="700000" y="5170000"/>
+            <a:ext cx="11000000" cy="850000"/>
+          </a:xfrm>
+          <a:prstGeom prst="rect">
+            <a:avLst/>
+          </a:prstGeom>
+          <a:solidFill>
+            <a:srgbClr val="FFFFFF"/>
+          </a:solidFill>
+          <a:ln w="12700">
+            <a:solidFill>
+              <a:srgbClr val="999999"/>
+            </a:solidFill>
+          </a:ln>
+        </p:spPr>
+        <p:style>
+          <a:lnRef idx="1">
+            <a:schemeClr val="accent1"/>
+          </a:lnRef>
+          <a:fillRef idx="3">
+            <a:schemeClr val="accent1"/>
+          </a:fillRef>
+          <a:effectRef idx="2">
+            <a:schemeClr val="accent1"/>
+          </a:effectRef>
+          <a:fontRef idx="minor">
+            <a:schemeClr val="lt1"/>
+          </a:fontRef>
+        </p:style>
+        <p:txBody>
+          <a:bodyPr rtlCol="0" anchor="ctr"/>
+          <a:lstStyle/>
+          <a:p>
+            <a:pPr algn="ctr"/>
+          </a:p>
+        </p:txBody>
+      </p:sp>
+      <p:sp>
+        <p:nvSpPr>
+          <p:cNvPr id="21" name="Rectangle 20"/>
+          <p:cNvSpPr/>
+          <p:nvPr/>
+        </p:nvSpPr>
+        <p:spPr>
+          <a:xfrm>
+            <a:off x="700000" y="5170000"/>
+            <a:ext cx="90000" cy="850000"/>
+          </a:xfrm>
+          <a:prstGeom prst="rect">
+            <a:avLst/>
+          </a:prstGeom>
+          <a:solidFill>
+            <a:srgbClr val="CC0000"/>
+          </a:solidFill>
+          <a:ln>
+            <a:noFill/>
+          </a:ln>
+        </p:spPr>
+        <p:style>
+          <a:lnRef idx="1">
+            <a:schemeClr val="accent1"/>
+          </a:lnRef>
+          <a:fillRef idx="3">
+            <a:schemeClr val="accent1"/>
+          </a:fillRef>
+          <a:effectRef idx="2">
+            <a:schemeClr val="accent1"/>
+          </a:effectRef>
+          <a:fontRef idx="minor">
+            <a:schemeClr val="lt1"/>
+          </a:fontRef>
+        </p:style>
+        <p:txBody>
+          <a:bodyPr rtlCol="0" anchor="ctr"/>
+          <a:lstStyle/>
+          <a:p>
+            <a:pPr algn="ctr"/>
+          </a:p>
+        </p:txBody>
+      </p:sp>
+      <p:sp>
+        <p:nvSpPr>
+          <p:cNvPr id="22" name="TextBox 21"/>
+          <p:cNvSpPr txBox="1"/>
+          <p:nvPr/>
+        </p:nvSpPr>
+        <p:spPr>
+          <a:xfrm>
+            <a:off x="1000000" y="5250000"/>
+            <a:ext cx="10400000" cy="690000"/>
+          </a:xfrm>
+          <a:prstGeom prst="rect">
+            <a:avLst/>
+          </a:prstGeom>
+          <a:noFill/>
+        </p:spPr>
+        <p:txBody>
+          <a:bodyPr wrap="square" anchor="ctr">
+            <a:spAutoFit/>
+          </a:bodyPr>
+          <a:lstStyle/>
+          <a:p>
+            <a:pPr algn="l"/>
+            <a:r>
+              <a:rPr sz="1300" b="0">
+                <a:solidFill>
+                  <a:srgbClr val="333333"/>
+                </a:solidFill>
+                <a:latin typeface="Open Sans"/>
+                <a:ea typeface="Open Sans"/>
+                <a:cs typeface="Open Sans"/>
+              </a:rPr>
+              <a:t>Следите за сознанием, дыханием и нарастанием отека</a:t>
+            </a:r>
+          </a:p>
+        </p:txBody>
+      </p:sp>
+    </p:spTree>
+  </p:cSld>
+  <p:clrMapOvr>
+    <a:masterClrMapping/>
+  </p:clrMapOvr>
+</p:sld>
+</file>
+
+<file path=ppt/slides/slide12.xml><?xml version="1.0" encoding="utf-8"?>
+<p:sld xmlns:a="http://schemas.openxmlformats.org/drawingml/2006/main" xmlns:p="http://schemas.openxmlformats.org/presentationml/2006/main" xmlns:r="http://schemas.openxmlformats.org/officeDocument/2006/relationships">
+  <p:cSld>
+    <p:spTree>
+      <p:nvGrpSpPr>
+        <p:cNvPr id="1" name=""/>
+        <p:cNvGrpSpPr/>
+        <p:nvPr/>
+      </p:nvGrpSpPr>
+      <p:grpSpPr/>
+      <p:sp>
+        <p:nvSpPr>
+          <p:cNvPr id="2" name="Rectangle 1"/>
+          <p:cNvSpPr/>
+          <p:nvPr/>
+        </p:nvSpPr>
+        <p:spPr>
+          <a:xfrm>
+            <a:off x="0" y="0"/>
+            <a:ext cx="12191695" cy="6858000"/>
+          </a:xfrm>
+          <a:prstGeom prst="rect">
+            <a:avLst/>
+          </a:prstGeom>
+          <a:solidFill>
+            <a:srgbClr val="FFFFFF"/>
+          </a:solidFill>
+          <a:ln>
+            <a:noFill/>
+          </a:ln>
+        </p:spPr>
+        <p:style>
+          <a:lnRef idx="1">
+            <a:schemeClr val="accent1"/>
+          </a:lnRef>
+          <a:fillRef idx="3">
+            <a:schemeClr val="accent1"/>
+          </a:fillRef>
+          <a:effectRef idx="2">
+            <a:schemeClr val="accent1"/>
+          </a:effectRef>
+          <a:fontRef idx="minor">
+            <a:schemeClr val="lt1"/>
+          </a:fontRef>
+        </p:style>
+        <p:txBody>
+          <a:bodyPr rtlCol="0" anchor="ctr"/>
+          <a:lstStyle/>
+          <a:p>
+            <a:pPr algn="ctr"/>
+          </a:p>
+        </p:txBody>
+      </p:sp>
+      <p:sp>
+        <p:nvSpPr>
+          <p:cNvPr id="3" name="TextBox 2"/>
+          <p:cNvSpPr txBox="1"/>
+          <p:nvPr/>
+        </p:nvSpPr>
+        <p:spPr>
+          <a:xfrm>
+            <a:off x="700000" y="250000"/>
+            <a:ext cx="11200000" cy="550000"/>
+          </a:xfrm>
+          <a:prstGeom prst="rect">
+            <a:avLst/>
+          </a:prstGeom>
+          <a:noFill/>
+        </p:spPr>
+        <p:txBody>
+          <a:bodyPr wrap="square" anchor="t">
+            <a:spAutoFit/>
+          </a:bodyPr>
+          <a:lstStyle/>
+          <a:p>
+            <a:pPr algn="l"/>
+            <a:r>
+              <a:rPr sz="2200" b="1">
+                <a:solidFill>
+                  <a:srgbClr val="333333"/>
+                </a:solidFill>
+                <a:latin typeface="Open Sans"/>
+                <a:ea typeface="Open Sans"/>
+                <a:cs typeface="Open Sans"/>
+              </a:rPr>
+              <a:t>ПАМЯТКА</a:t>
+            </a:r>
+          </a:p>
+        </p:txBody>
+      </p:sp>
+      <p:sp>
+        <p:nvSpPr>
+          <p:cNvPr id="4" name="Rectangle 3"/>
+          <p:cNvSpPr/>
+          <p:nvPr/>
+        </p:nvSpPr>
+        <p:spPr>
+          <a:xfrm>
+            <a:off x="700000" y="850000"/>
+            <a:ext cx="9000000" cy="28000"/>
+          </a:xfrm>
+          <a:prstGeom prst="rect">
+            <a:avLst/>
+          </a:prstGeom>
+          <a:solidFill>
+            <a:srgbClr val="555555"/>
+          </a:solidFill>
+          <a:ln>
+            <a:noFill/>
+          </a:ln>
+        </p:spPr>
+        <p:style>
+          <a:lnRef idx="1">
+            <a:schemeClr val="accent1"/>
+          </a:lnRef>
+          <a:fillRef idx="3">
+            <a:schemeClr val="accent1"/>
+          </a:fillRef>
+          <a:effectRef idx="2">
+            <a:schemeClr val="accent1"/>
+          </a:effectRef>
+          <a:fontRef idx="minor">
+            <a:schemeClr val="lt1"/>
+          </a:fontRef>
+        </p:style>
+        <p:txBody>
+          <a:bodyPr rtlCol="0" anchor="ctr"/>
+          <a:lstStyle/>
+          <a:p>
+            <a:pPr algn="ctr"/>
+          </a:p>
+        </p:txBody>
+      </p:sp>
+      <p:sp>
+        <p:nvSpPr>
+          <p:cNvPr id="5" name="TextBox 4"/>
+          <p:cNvSpPr txBox="1"/>
+          <p:nvPr/>
+        </p:nvSpPr>
+        <p:spPr>
+          <a:xfrm>
+            <a:off x="700000" y="920000"/>
+            <a:ext cx="11000000" cy="350000"/>
+          </a:xfrm>
+          <a:prstGeom prst="rect">
+            <a:avLst/>
+          </a:prstGeom>
+          <a:noFill/>
+        </p:spPr>
+        <p:txBody>
+          <a:bodyPr wrap="square" anchor="t">
+            <a:spAutoFit/>
+          </a:bodyPr>
+          <a:lstStyle/>
+          <a:p>
+            <a:pPr algn="l"/>
+            <a:r>
+              <a:rPr sz="1200" b="0">
+                <a:solidFill>
+                  <a:srgbClr val="666666"/>
+                </a:solidFill>
+                <a:latin typeface="Open Sans"/>
+                <a:ea typeface="Open Sans"/>
+                <a:cs typeface="Open Sans"/>
+              </a:rPr>
+              <a:t>Оказание первой помощи при травмах, ранениях и поражениях, прочих состояниях</a:t>
+            </a:r>
+          </a:p>
+        </p:txBody>
+      </p:sp>
+      <p:sp>
+        <p:nvSpPr>
+          <p:cNvPr id="6" name="Rectangle 5"/>
+          <p:cNvSpPr/>
+          <p:nvPr/>
+        </p:nvSpPr>
+        <p:spPr>
+          <a:xfrm>
+            <a:off x="0" y="2800000"/>
+            <a:ext cx="420000" cy="420000"/>
+          </a:xfrm>
+          <a:prstGeom prst="rect">
+            <a:avLst/>
+          </a:prstGeom>
+          <a:solidFill>
+            <a:srgbClr val="555555"/>
+          </a:solidFill>
+          <a:ln>
+            <a:noFill/>
+          </a:ln>
+        </p:spPr>
+        <p:style>
+          <a:lnRef idx="1">
+            <a:schemeClr val="accent1"/>
+          </a:lnRef>
+          <a:fillRef idx="3">
+            <a:schemeClr val="accent1"/>
+          </a:fillRef>
+          <a:effectRef idx="2">
+            <a:schemeClr val="accent1"/>
+          </a:effectRef>
+          <a:fontRef idx="minor">
+            <a:schemeClr val="lt1"/>
+          </a:fontRef>
+        </p:style>
+        <p:txBody>
+          <a:bodyPr rtlCol="0" anchor="ctr"/>
+          <a:lstStyle/>
+          <a:p>
+            <a:pPr algn="ctr"/>
+          </a:p>
+        </p:txBody>
+      </p:sp>
+      <p:sp>
+        <p:nvSpPr>
+          <p:cNvPr id="7" name="TextBox 6"/>
+          <p:cNvSpPr txBox="1"/>
+          <p:nvPr/>
+        </p:nvSpPr>
+        <p:spPr>
+          <a:xfrm>
+            <a:off x="0" y="2800000"/>
+            <a:ext cx="420000" cy="420000"/>
+          </a:xfrm>
+          <a:prstGeom prst="rect">
+            <a:avLst/>
+          </a:prstGeom>
+          <a:noFill/>
+        </p:spPr>
+        <p:txBody>
+          <a:bodyPr wrap="square" anchor="ctr">
+            <a:spAutoFit/>
+          </a:bodyPr>
+          <a:lstStyle/>
+          <a:p>
+            <a:pPr algn="ctr"/>
+            <a:r>
+              <a:rPr sz="1400" b="1">
+                <a:solidFill>
+                  <a:srgbClr val="FFFFFF"/>
+                </a:solidFill>
+                <a:latin typeface="Open Sans"/>
+                <a:ea typeface="Open Sans"/>
+                <a:cs typeface="Open Sans"/>
+              </a:rPr>
+              <a:t>12</a:t>
+            </a:r>
+          </a:p>
+        </p:txBody>
+      </p:sp>
+      <p:pic>
+        <p:nvPicPr>
+          <p:cNvPr id="8" name="Picture 7" descr="pamyatka-tema4-ukusy-16x9.png"/>
+          <p:cNvPicPr>
+            <a:picLocks noChangeAspect="1"/>
+          </p:cNvPicPr>
+          <p:nvPr/>
+        </p:nvPicPr>
+        <p:blipFill>
+          <a:blip r:embed="rId2"/>
+          <a:stretch>
+            <a:fillRect/>
+          </a:stretch>
+        </p:blipFill>
+        <p:spPr>
+          <a:xfrm>
+            <a:off x="2300000" y="1400000"/>
+            <a:ext cx="7800000" cy="5200000"/>
+          </a:xfrm>
+          <a:prstGeom prst="rect">
+            <a:avLst/>
+          </a:prstGeom>
+        </p:spPr>
+      </p:pic>
+    </p:spTree>
+  </p:cSld>
+  <p:clrMapOvr>
+    <a:masterClrMapping/>
+  </p:clrMapOvr>
+</p:sld>
+</file>
+
+<file path=ppt/slides/slide13.xml><?xml version="1.0" encoding="utf-8"?>
+<p:sld xmlns:a="http://schemas.openxmlformats.org/drawingml/2006/main" xmlns:p="http://schemas.openxmlformats.org/presentationml/2006/main" xmlns:r="http://schemas.openxmlformats.org/officeDocument/2006/relationships">
+  <p:cSld>
+    <p:spTree>
+      <p:nvGrpSpPr>
+        <p:cNvPr id="1" name=""/>
+        <p:cNvGrpSpPr/>
+        <p:nvPr/>
+      </p:nvGrpSpPr>
+      <p:grpSpPr/>
+      <p:sp>
+        <p:nvSpPr>
+          <p:cNvPr id="2" name="Rectangle 1"/>
+          <p:cNvSpPr/>
+          <p:nvPr/>
+        </p:nvSpPr>
+        <p:spPr>
+          <a:xfrm>
+            <a:off x="0" y="0"/>
+            <a:ext cx="3400000" cy="6858000"/>
+          </a:xfrm>
+          <a:prstGeom prst="rect">
+            <a:avLst/>
+          </a:prstGeom>
+          <a:solidFill>
+            <a:srgbClr val="DDDDDD"/>
+          </a:solidFill>
+          <a:ln>
+            <a:noFill/>
+          </a:ln>
+        </p:spPr>
+        <p:style>
+          <a:lnRef idx="1">
+            <a:schemeClr val="accent1"/>
+          </a:lnRef>
+          <a:fillRef idx="3">
+            <a:schemeClr val="accent1"/>
+          </a:fillRef>
+          <a:effectRef idx="2">
+            <a:schemeClr val="accent1"/>
+          </a:effectRef>
+          <a:fontRef idx="minor">
+            <a:schemeClr val="lt1"/>
+          </a:fontRef>
+        </p:style>
+        <p:txBody>
+          <a:bodyPr rtlCol="0" anchor="ctr"/>
+          <a:lstStyle/>
+          <a:p>
+            <a:pPr algn="ctr"/>
+          </a:p>
+        </p:txBody>
+      </p:sp>
+      <p:sp>
+        <p:nvSpPr>
+          <p:cNvPr id="3" name="Rectangle 2"/>
+          <p:cNvSpPr/>
+          <p:nvPr/>
+        </p:nvSpPr>
+        <p:spPr>
+          <a:xfrm>
+            <a:off x="3400000" y="0"/>
+            <a:ext cx="8800000" cy="6858000"/>
+          </a:xfrm>
+          <a:prstGeom prst="rect">
+            <a:avLst/>
+          </a:prstGeom>
+          <a:solidFill>
+            <a:srgbClr val="F8F8F8"/>
+          </a:solidFill>
+          <a:ln>
+            <a:noFill/>
+          </a:ln>
+        </p:spPr>
+        <p:style>
+          <a:lnRef idx="1">
+            <a:schemeClr val="accent1"/>
+          </a:lnRef>
+          <a:fillRef idx="3">
+            <a:schemeClr val="accent1"/>
+          </a:fillRef>
+          <a:effectRef idx="2">
+            <a:schemeClr val="accent1"/>
+          </a:effectRef>
+          <a:fontRef idx="minor">
+            <a:schemeClr val="lt1"/>
+          </a:fontRef>
+        </p:style>
+        <p:txBody>
+          <a:bodyPr rtlCol="0" anchor="ctr"/>
+          <a:lstStyle/>
+          <a:p>
+            <a:pPr algn="ctr"/>
+          </a:p>
+        </p:txBody>
+      </p:sp>
+      <p:sp>
+        <p:nvSpPr>
+          <p:cNvPr id="4" name="TextBox 3"/>
+          <p:cNvSpPr txBox="1"/>
+          <p:nvPr/>
+        </p:nvSpPr>
+        <p:spPr>
+          <a:xfrm>
+            <a:off x="4000000" y="3000000"/>
+            <a:ext cx="7500000" cy="1000000"/>
+          </a:xfrm>
+          <a:prstGeom prst="rect">
+            <a:avLst/>
+          </a:prstGeom>
+          <a:noFill/>
+        </p:spPr>
+        <p:txBody>
+          <a:bodyPr wrap="square" anchor="ctr">
+            <a:spAutoFit/>
+          </a:bodyPr>
+          <a:lstStyle/>
+          <a:p>
+            <a:pPr algn="l"/>
+            <a:r>
+              <a:rPr sz="3000" b="1">
+                <a:solidFill>
+                  <a:srgbClr val="333333"/>
+                </a:solidFill>
+                <a:latin typeface="Open Sans"/>
+                <a:ea typeface="Open Sans"/>
+                <a:cs typeface="Open Sans"/>
+              </a:rPr>
+              <a:t>БЛАГОДАРИМ ЗА ВНИМАНИЕ</a:t>
+            </a:r>
+          </a:p>
+        </p:txBody>
+      </p:sp>
+      <p:sp>
+        <p:nvSpPr>
+          <p:cNvPr id="5" name="Rectangle 4"/>
+          <p:cNvSpPr/>
+          <p:nvPr/>
+        </p:nvSpPr>
+        <p:spPr>
+          <a:xfrm>
+            <a:off x="4000000" y="4100000"/>
+            <a:ext cx="4500000" cy="30000"/>
+          </a:xfrm>
+          <a:prstGeom prst="rect">
+            <a:avLst/>
+          </a:prstGeom>
+          <a:solidFill>
+            <a:srgbClr val="333333"/>
+          </a:solidFill>
+          <a:ln>
+            <a:noFill/>
+          </a:ln>
+        </p:spPr>
+        <p:style>
+          <a:lnRef idx="1">
+            <a:schemeClr val="accent1"/>
+          </a:lnRef>
+          <a:fillRef idx="3">
+            <a:schemeClr val="accent1"/>
+          </a:fillRef>
+          <a:effectRef idx="2">
+            <a:schemeClr val="accent1"/>
+          </a:effectRef>
+          <a:fontRef idx="minor">
+            <a:schemeClr val="lt1"/>
+          </a:fontRef>
+        </p:style>
+        <p:txBody>
+          <a:bodyPr rtlCol="0" anchor="ctr"/>
+          <a:lstStyle/>
+          <a:p>
+            <a:pPr algn="ctr"/>
+          </a:p>
+        </p:txBody>
+      </p:sp>
+    </p:spTree>
+  </p:cSld>
+  <p:clrMapOvr>
+    <a:masterClrMapping/>
+  </p:clrMapOvr>
+</p:sld>
+</file>
+
 <file path=ppt/slides/slide2.xml><?xml version="1.0" encoding="utf-8"?>
 <p:sld xmlns:a="http://schemas.openxmlformats.org/drawingml/2006/main" xmlns:p="http://schemas.openxmlformats.org/presentationml/2006/main" xmlns:r="http://schemas.openxmlformats.org/officeDocument/2006/relationships">
   <p:cSld>
@@ -3920,7 +5724,7 @@
                 <a:ea typeface="Open Sans"/>
                 <a:cs typeface="Open Sans"/>
               </a:rPr>
-              <a:t>Оценка состояния</a:t>
+              <a:t>Общий порядок</a:t>
             </a:r>
           </a:p>
         </p:txBody>
@@ -4082,7 +5886,7 @@
                 <a:ea typeface="Open Sans"/>
                 <a:cs typeface="Open Sans"/>
               </a:rPr>
-              <a:t>Общие действия</a:t>
+              <a:t>Холод и неподвижность</a:t>
             </a:r>
           </a:p>
         </p:txBody>
@@ -4244,7 +6048,7 @@
                 <a:ea typeface="Open Sans"/>
                 <a:cs typeface="Open Sans"/>
               </a:rPr>
-              <a:t>Холод и покой</a:t>
+              <a:t>Запрещенные действия</a:t>
             </a:r>
           </a:p>
         </p:txBody>
@@ -4406,7 +6210,7 @@
                 <a:ea typeface="Open Sans"/>
                 <a:cs typeface="Open Sans"/>
               </a:rPr>
-              <a:t>Наблюдение</a:t>
+              <a:t>Признаки ухудшения</a:t>
             </a:r>
           </a:p>
         </p:txBody>
@@ -4504,7 +6308,7 @@
                 <a:ea typeface="Open Sans"/>
                 <a:cs typeface="Open Sans"/>
               </a:rPr>
-              <a:t>УКУС ИЛИ УЖАЛИВАНИЕ</a:t>
+              <a:t>УКУС И УЖАЛИВАНИЕ КАК ПУТЬ ОТРАВЛЕНИЯ</a:t>
             </a:r>
           </a:p>
         </p:txBody>
@@ -4677,8 +6481,8 @@
         </p:nvSpPr>
         <p:spPr>
           <a:xfrm>
-            <a:off x="700000" y="1600000"/>
-            <a:ext cx="11000000" cy="4200000"/>
+            <a:off x="700000" y="1500000"/>
+            <a:ext cx="11000000" cy="4900000"/>
           </a:xfrm>
           <a:prstGeom prst="rect">
             <a:avLst/>
@@ -4693,7 +6497,7 @@
           <a:p>
             <a:pPr algn="l"/>
             <a:r>
-              <a:rPr sz="1600" b="0">
+              <a:rPr sz="1500" b="0">
                 <a:solidFill>
                   <a:srgbClr val="333333"/>
                 </a:solidFill>
@@ -4701,7 +6505,7 @@
                 <a:ea typeface="Open Sans"/>
                 <a:cs typeface="Open Sans"/>
               </a:rPr>
-              <a:t>Яд может попасть в организм при укусе или ужаливании. Помощь строится по общим принципам действий при отравлении и постоянной оценке состояния.</a:t>
+              <a:t>При укусе или ужаливании яд, слюна либо другое биологическое вещество может попасть непосредственно в ткани. Местное повреждение способно сочетаться с общей токсической или аллергической реакцией, поэтому помощь строится по принципам действий при отравлении.</a:t>
             </a:r>
           </a:p>
         </p:txBody>
@@ -4799,7 +6603,7 @@
                 <a:ea typeface="Open Sans"/>
                 <a:cs typeface="Open Sans"/>
               </a:rPr>
-              <a:t>ПОСЛЕДОВАТЕЛЬНОСТЬ ДЕЙСТВИЙ</a:t>
+              <a:t>СНАЧАЛА ОБЕСПЕЧЬТЕ БЕЗОПАСНОСТЬ</a:t>
             </a:r>
           </a:p>
         </p:txBody>
@@ -4966,20 +6770,133 @@
       </p:sp>
       <p:sp>
         <p:nvSpPr>
-          <p:cNvPr id="8" name="Oval 7"/>
+          <p:cNvPr id="8" name="TextBox 7"/>
+          <p:cNvSpPr txBox="1"/>
+          <p:nvPr/>
+        </p:nvSpPr>
+        <p:spPr>
+          <a:xfrm>
+            <a:off x="700000" y="1450000"/>
+            <a:ext cx="11000000" cy="4000000"/>
+          </a:xfrm>
+          <a:prstGeom prst="rect">
+            <a:avLst/>
+          </a:prstGeom>
+          <a:noFill/>
+        </p:spPr>
+        <p:txBody>
+          <a:bodyPr wrap="square">
+            <a:spAutoFit/>
+          </a:bodyPr>
+          <a:lstStyle/>
+          <a:p>
+            <a:pPr algn="l">
+              <a:spcAft>
+                <a:spcPts val="800"/>
+              </a:spcAft>
+            </a:pPr>
+            <a:r>
+              <a:rPr sz="1400" b="0">
+                <a:solidFill>
+                  <a:srgbClr val="333333"/>
+                </a:solidFill>
+                <a:latin typeface="Open Sans"/>
+                <a:ea typeface="Open Sans"/>
+                <a:cs typeface="Open Sans"/>
+              </a:rPr>
+              <a:t>•  Не приближайтесь к агрессивному животному, змее или скоплению насекомых.</a:t>
+            </a:r>
+          </a:p>
+          <a:p>
+            <a:pPr algn="l">
+              <a:spcAft>
+                <a:spcPts val="800"/>
+              </a:spcAft>
+            </a:pPr>
+            <a:r>
+              <a:rPr sz="1400" b="0">
+                <a:solidFill>
+                  <a:srgbClr val="333333"/>
+                </a:solidFill>
+                <a:latin typeface="Open Sans"/>
+                <a:ea typeface="Open Sans"/>
+                <a:cs typeface="Open Sans"/>
+              </a:rPr>
+              <a:t>•  Предупредите окружающих и при необходимости вызовите специальные службы.</a:t>
+            </a:r>
+          </a:p>
+          <a:p>
+            <a:pPr algn="l">
+              <a:spcAft>
+                <a:spcPts val="800"/>
+              </a:spcAft>
+            </a:pPr>
+            <a:r>
+              <a:rPr sz="1400" b="0">
+                <a:solidFill>
+                  <a:srgbClr val="333333"/>
+                </a:solidFill>
+                <a:latin typeface="Open Sans"/>
+                <a:ea typeface="Open Sans"/>
+                <a:cs typeface="Open Sans"/>
+              </a:rPr>
+              <a:t>•  Не ловите и не убивайте животное ради опознания.</a:t>
+            </a:r>
+          </a:p>
+          <a:p>
+            <a:pPr algn="l">
+              <a:spcAft>
+                <a:spcPts val="800"/>
+              </a:spcAft>
+            </a:pPr>
+            <a:r>
+              <a:rPr sz="1400" b="0">
+                <a:solidFill>
+                  <a:srgbClr val="333333"/>
+                </a:solidFill>
+                <a:latin typeface="Open Sans"/>
+                <a:ea typeface="Open Sans"/>
+                <a:cs typeface="Open Sans"/>
+              </a:rPr>
+              <a:t>•  Запомните внешний вид или сфотографируйте источник с безопасного расстояния.</a:t>
+            </a:r>
+          </a:p>
+          <a:p>
+            <a:pPr algn="l">
+              <a:spcAft>
+                <a:spcPts val="800"/>
+              </a:spcAft>
+            </a:pPr>
+            <a:r>
+              <a:rPr sz="1400" b="0">
+                <a:solidFill>
+                  <a:srgbClr val="333333"/>
+                </a:solidFill>
+                <a:latin typeface="Open Sans"/>
+                <a:ea typeface="Open Sans"/>
+                <a:cs typeface="Open Sans"/>
+              </a:rPr>
+              <a:t>•  Переместите пострадавшего только после устранения непосредственной угрозы.</a:t>
+            </a:r>
+          </a:p>
+        </p:txBody>
+      </p:sp>
+      <p:sp>
+        <p:nvSpPr>
+          <p:cNvPr id="9" name="Rounded Rectangle 8"/>
           <p:cNvSpPr/>
           <p:nvPr/>
         </p:nvSpPr>
         <p:spPr>
           <a:xfrm>
-            <a:off x="700000" y="1450000"/>
-            <a:ext cx="550000" cy="550000"/>
-          </a:xfrm>
-          <a:prstGeom prst="ellipse">
+            <a:off x="700000" y="5600000"/>
+            <a:ext cx="11000000" cy="1000000"/>
+          </a:xfrm>
+          <a:prstGeom prst="roundRect">
             <a:avLst/>
           </a:prstGeom>
           <a:solidFill>
-            <a:srgbClr val="CC0000"/>
+            <a:srgbClr val="F5F0E1"/>
           </a:solidFill>
           <a:ln>
             <a:noFill/>
@@ -5009,14 +6926,14 @@
       </p:sp>
       <p:sp>
         <p:nvSpPr>
-          <p:cNvPr id="9" name="TextBox 8"/>
+          <p:cNvPr id="10" name="TextBox 9"/>
           <p:cNvSpPr txBox="1"/>
           <p:nvPr/>
         </p:nvSpPr>
         <p:spPr>
           <a:xfrm>
-            <a:off x="700000" y="1450000"/>
-            <a:ext cx="550000" cy="550000"/>
+            <a:off x="950000" y="5800000"/>
+            <a:ext cx="10500000" cy="600000"/>
           </a:xfrm>
           <a:prstGeom prst="rect">
             <a:avLst/>
@@ -5029,747 +6946,17 @@
           </a:bodyPr>
           <a:lstStyle/>
           <a:p>
-            <a:pPr algn="ctr"/>
-            <a:r>
-              <a:rPr sz="1400" b="1">
-                <a:solidFill>
-                  <a:srgbClr val="FFFFFF"/>
+            <a:pPr algn="l"/>
+            <a:r>
+              <a:rPr sz="1200" b="0">
+                <a:solidFill>
+                  <a:srgbClr val="333333"/>
                 </a:solidFill>
                 <a:latin typeface="Open Sans"/>
                 <a:ea typeface="Open Sans"/>
                 <a:cs typeface="Open Sans"/>
               </a:rPr>
-              <a:t>1</a:t>
-            </a:r>
-          </a:p>
-        </p:txBody>
-      </p:sp>
-      <p:sp>
-        <p:nvSpPr>
-          <p:cNvPr id="10" name="Rectangle 9"/>
-          <p:cNvSpPr/>
-          <p:nvPr/>
-        </p:nvSpPr>
-        <p:spPr>
-          <a:xfrm>
-            <a:off x="1450000" y="1450000"/>
-            <a:ext cx="10500000" cy="550000"/>
-          </a:xfrm>
-          <a:prstGeom prst="rect">
-            <a:avLst/>
-          </a:prstGeom>
-          <a:solidFill>
-            <a:srgbClr val="FFFFFF"/>
-          </a:solidFill>
-          <a:ln w="12700">
-            <a:solidFill>
-              <a:srgbClr val="999999"/>
-            </a:solidFill>
-          </a:ln>
-        </p:spPr>
-        <p:style>
-          <a:lnRef idx="1">
-            <a:schemeClr val="accent1"/>
-          </a:lnRef>
-          <a:fillRef idx="3">
-            <a:schemeClr val="accent1"/>
-          </a:fillRef>
-          <a:effectRef idx="2">
-            <a:schemeClr val="accent1"/>
-          </a:effectRef>
-          <a:fontRef idx="minor">
-            <a:schemeClr val="lt1"/>
-          </a:fontRef>
-        </p:style>
-        <p:txBody>
-          <a:bodyPr rtlCol="0" anchor="ctr"/>
-          <a:lstStyle/>
-          <a:p>
-            <a:pPr algn="ctr"/>
-          </a:p>
-        </p:txBody>
-      </p:sp>
-      <p:sp>
-        <p:nvSpPr>
-          <p:cNvPr id="11" name="TextBox 10"/>
-          <p:cNvSpPr txBox="1"/>
-          <p:nvPr/>
-        </p:nvSpPr>
-        <p:spPr>
-          <a:xfrm>
-            <a:off x="1650000" y="1450000"/>
-            <a:ext cx="10100000" cy="550000"/>
-          </a:xfrm>
-          <a:prstGeom prst="rect">
-            <a:avLst/>
-          </a:prstGeom>
-          <a:noFill/>
-        </p:spPr>
-        <p:txBody>
-          <a:bodyPr wrap="square" anchor="ctr">
-            <a:spAutoFit/>
-          </a:bodyPr>
-          <a:lstStyle/>
-          <a:p>
-            <a:pPr algn="l"/>
-            <a:r>
-              <a:rPr sz="1300" b="0">
-                <a:solidFill>
-                  <a:srgbClr val="333333"/>
-                </a:solidFill>
-                <a:latin typeface="Open Sans"/>
-                <a:ea typeface="Open Sans"/>
-                <a:cs typeface="Open Sans"/>
-              </a:rPr>
-              <a:t>Убедитесь, что животное или насекомое больше не угрожает.</a:t>
-            </a:r>
-          </a:p>
-        </p:txBody>
-      </p:sp>
-      <p:sp>
-        <p:nvSpPr>
-          <p:cNvPr id="12" name="Oval 11"/>
-          <p:cNvSpPr/>
-          <p:nvPr/>
-        </p:nvSpPr>
-        <p:spPr>
-          <a:xfrm>
-            <a:off x="700000" y="2320000"/>
-            <a:ext cx="550000" cy="550000"/>
-          </a:xfrm>
-          <a:prstGeom prst="ellipse">
-            <a:avLst/>
-          </a:prstGeom>
-          <a:solidFill>
-            <a:srgbClr val="555555"/>
-          </a:solidFill>
-          <a:ln>
-            <a:noFill/>
-          </a:ln>
-        </p:spPr>
-        <p:style>
-          <a:lnRef idx="1">
-            <a:schemeClr val="accent1"/>
-          </a:lnRef>
-          <a:fillRef idx="3">
-            <a:schemeClr val="accent1"/>
-          </a:fillRef>
-          <a:effectRef idx="2">
-            <a:schemeClr val="accent1"/>
-          </a:effectRef>
-          <a:fontRef idx="minor">
-            <a:schemeClr val="lt1"/>
-          </a:fontRef>
-        </p:style>
-        <p:txBody>
-          <a:bodyPr rtlCol="0" anchor="ctr"/>
-          <a:lstStyle/>
-          <a:p>
-            <a:pPr algn="ctr"/>
-          </a:p>
-        </p:txBody>
-      </p:sp>
-      <p:sp>
-        <p:nvSpPr>
-          <p:cNvPr id="13" name="TextBox 12"/>
-          <p:cNvSpPr txBox="1"/>
-          <p:nvPr/>
-        </p:nvSpPr>
-        <p:spPr>
-          <a:xfrm>
-            <a:off x="700000" y="2320000"/>
-            <a:ext cx="550000" cy="550000"/>
-          </a:xfrm>
-          <a:prstGeom prst="rect">
-            <a:avLst/>
-          </a:prstGeom>
-          <a:noFill/>
-        </p:spPr>
-        <p:txBody>
-          <a:bodyPr wrap="square" anchor="ctr">
-            <a:spAutoFit/>
-          </a:bodyPr>
-          <a:lstStyle/>
-          <a:p>
-            <a:pPr algn="ctr"/>
-            <a:r>
-              <a:rPr sz="1400" b="1">
-                <a:solidFill>
-                  <a:srgbClr val="FFFFFF"/>
-                </a:solidFill>
-                <a:latin typeface="Open Sans"/>
-                <a:ea typeface="Open Sans"/>
-                <a:cs typeface="Open Sans"/>
-              </a:rPr>
-              <a:t>2</a:t>
-            </a:r>
-          </a:p>
-        </p:txBody>
-      </p:sp>
-      <p:sp>
-        <p:nvSpPr>
-          <p:cNvPr id="14" name="Rectangle 13"/>
-          <p:cNvSpPr/>
-          <p:nvPr/>
-        </p:nvSpPr>
-        <p:spPr>
-          <a:xfrm>
-            <a:off x="1450000" y="2320000"/>
-            <a:ext cx="10500000" cy="550000"/>
-          </a:xfrm>
-          <a:prstGeom prst="rect">
-            <a:avLst/>
-          </a:prstGeom>
-          <a:solidFill>
-            <a:srgbClr val="FFFFFF"/>
-          </a:solidFill>
-          <a:ln w="12700">
-            <a:solidFill>
-              <a:srgbClr val="999999"/>
-            </a:solidFill>
-          </a:ln>
-        </p:spPr>
-        <p:style>
-          <a:lnRef idx="1">
-            <a:schemeClr val="accent1"/>
-          </a:lnRef>
-          <a:fillRef idx="3">
-            <a:schemeClr val="accent1"/>
-          </a:fillRef>
-          <a:effectRef idx="2">
-            <a:schemeClr val="accent1"/>
-          </a:effectRef>
-          <a:fontRef idx="minor">
-            <a:schemeClr val="lt1"/>
-          </a:fontRef>
-        </p:style>
-        <p:txBody>
-          <a:bodyPr rtlCol="0" anchor="ctr"/>
-          <a:lstStyle/>
-          <a:p>
-            <a:pPr algn="ctr"/>
-          </a:p>
-        </p:txBody>
-      </p:sp>
-      <p:sp>
-        <p:nvSpPr>
-          <p:cNvPr id="15" name="TextBox 14"/>
-          <p:cNvSpPr txBox="1"/>
-          <p:nvPr/>
-        </p:nvSpPr>
-        <p:spPr>
-          <a:xfrm>
-            <a:off x="1650000" y="2320000"/>
-            <a:ext cx="10100000" cy="550000"/>
-          </a:xfrm>
-          <a:prstGeom prst="rect">
-            <a:avLst/>
-          </a:prstGeom>
-          <a:noFill/>
-        </p:spPr>
-        <p:txBody>
-          <a:bodyPr wrap="square" anchor="ctr">
-            <a:spAutoFit/>
-          </a:bodyPr>
-          <a:lstStyle/>
-          <a:p>
-            <a:pPr algn="l"/>
-            <a:r>
-              <a:rPr sz="1300" b="0">
-                <a:solidFill>
-                  <a:srgbClr val="333333"/>
-                </a:solidFill>
-                <a:latin typeface="Open Sans"/>
-                <a:ea typeface="Open Sans"/>
-                <a:cs typeface="Open Sans"/>
-              </a:rPr>
-              <a:t>Оцените сознание, дыхание и место повреждения.</a:t>
-            </a:r>
-          </a:p>
-        </p:txBody>
-      </p:sp>
-      <p:sp>
-        <p:nvSpPr>
-          <p:cNvPr id="16" name="Oval 15"/>
-          <p:cNvSpPr/>
-          <p:nvPr/>
-        </p:nvSpPr>
-        <p:spPr>
-          <a:xfrm>
-            <a:off x="700000" y="3190000"/>
-            <a:ext cx="550000" cy="550000"/>
-          </a:xfrm>
-          <a:prstGeom prst="ellipse">
-            <a:avLst/>
-          </a:prstGeom>
-          <a:solidFill>
-            <a:srgbClr val="555555"/>
-          </a:solidFill>
-          <a:ln>
-            <a:noFill/>
-          </a:ln>
-        </p:spPr>
-        <p:style>
-          <a:lnRef idx="1">
-            <a:schemeClr val="accent1"/>
-          </a:lnRef>
-          <a:fillRef idx="3">
-            <a:schemeClr val="accent1"/>
-          </a:fillRef>
-          <a:effectRef idx="2">
-            <a:schemeClr val="accent1"/>
-          </a:effectRef>
-          <a:fontRef idx="minor">
-            <a:schemeClr val="lt1"/>
-          </a:fontRef>
-        </p:style>
-        <p:txBody>
-          <a:bodyPr rtlCol="0" anchor="ctr"/>
-          <a:lstStyle/>
-          <a:p>
-            <a:pPr algn="ctr"/>
-          </a:p>
-        </p:txBody>
-      </p:sp>
-      <p:sp>
-        <p:nvSpPr>
-          <p:cNvPr id="17" name="TextBox 16"/>
-          <p:cNvSpPr txBox="1"/>
-          <p:nvPr/>
-        </p:nvSpPr>
-        <p:spPr>
-          <a:xfrm>
-            <a:off x="700000" y="3190000"/>
-            <a:ext cx="550000" cy="550000"/>
-          </a:xfrm>
-          <a:prstGeom prst="rect">
-            <a:avLst/>
-          </a:prstGeom>
-          <a:noFill/>
-        </p:spPr>
-        <p:txBody>
-          <a:bodyPr wrap="square" anchor="ctr">
-            <a:spAutoFit/>
-          </a:bodyPr>
-          <a:lstStyle/>
-          <a:p>
-            <a:pPr algn="ctr"/>
-            <a:r>
-              <a:rPr sz="1400" b="1">
-                <a:solidFill>
-                  <a:srgbClr val="FFFFFF"/>
-                </a:solidFill>
-                <a:latin typeface="Open Sans"/>
-                <a:ea typeface="Open Sans"/>
-                <a:cs typeface="Open Sans"/>
-              </a:rPr>
-              <a:t>3</a:t>
-            </a:r>
-          </a:p>
-        </p:txBody>
-      </p:sp>
-      <p:sp>
-        <p:nvSpPr>
-          <p:cNvPr id="18" name="Rectangle 17"/>
-          <p:cNvSpPr/>
-          <p:nvPr/>
-        </p:nvSpPr>
-        <p:spPr>
-          <a:xfrm>
-            <a:off x="1450000" y="3190000"/>
-            <a:ext cx="10500000" cy="550000"/>
-          </a:xfrm>
-          <a:prstGeom prst="rect">
-            <a:avLst/>
-          </a:prstGeom>
-          <a:solidFill>
-            <a:srgbClr val="FFFFFF"/>
-          </a:solidFill>
-          <a:ln w="12700">
-            <a:solidFill>
-              <a:srgbClr val="999999"/>
-            </a:solidFill>
-          </a:ln>
-        </p:spPr>
-        <p:style>
-          <a:lnRef idx="1">
-            <a:schemeClr val="accent1"/>
-          </a:lnRef>
-          <a:fillRef idx="3">
-            <a:schemeClr val="accent1"/>
-          </a:fillRef>
-          <a:effectRef idx="2">
-            <a:schemeClr val="accent1"/>
-          </a:effectRef>
-          <a:fontRef idx="minor">
-            <a:schemeClr val="lt1"/>
-          </a:fontRef>
-        </p:style>
-        <p:txBody>
-          <a:bodyPr rtlCol="0" anchor="ctr"/>
-          <a:lstStyle/>
-          <a:p>
-            <a:pPr algn="ctr"/>
-          </a:p>
-        </p:txBody>
-      </p:sp>
-      <p:sp>
-        <p:nvSpPr>
-          <p:cNvPr id="19" name="TextBox 18"/>
-          <p:cNvSpPr txBox="1"/>
-          <p:nvPr/>
-        </p:nvSpPr>
-        <p:spPr>
-          <a:xfrm>
-            <a:off x="1650000" y="3190000"/>
-            <a:ext cx="10100000" cy="550000"/>
-          </a:xfrm>
-          <a:prstGeom prst="rect">
-            <a:avLst/>
-          </a:prstGeom>
-          <a:noFill/>
-        </p:spPr>
-        <p:txBody>
-          <a:bodyPr wrap="square" anchor="ctr">
-            <a:spAutoFit/>
-          </a:bodyPr>
-          <a:lstStyle/>
-          <a:p>
-            <a:pPr algn="l"/>
-            <a:r>
-              <a:rPr sz="1300" b="0">
-                <a:solidFill>
-                  <a:srgbClr val="333333"/>
-                </a:solidFill>
-                <a:latin typeface="Open Sans"/>
-                <a:ea typeface="Open Sans"/>
-                <a:cs typeface="Open Sans"/>
-              </a:rPr>
-              <a:t>Вызовите скорую медицинскую помощь.</a:t>
-            </a:r>
-          </a:p>
-        </p:txBody>
-      </p:sp>
-      <p:sp>
-        <p:nvSpPr>
-          <p:cNvPr id="20" name="Oval 19"/>
-          <p:cNvSpPr/>
-          <p:nvPr/>
-        </p:nvSpPr>
-        <p:spPr>
-          <a:xfrm>
-            <a:off x="700000" y="4060000"/>
-            <a:ext cx="550000" cy="550000"/>
-          </a:xfrm>
-          <a:prstGeom prst="ellipse">
-            <a:avLst/>
-          </a:prstGeom>
-          <a:solidFill>
-            <a:srgbClr val="555555"/>
-          </a:solidFill>
-          <a:ln>
-            <a:noFill/>
-          </a:ln>
-        </p:spPr>
-        <p:style>
-          <a:lnRef idx="1">
-            <a:schemeClr val="accent1"/>
-          </a:lnRef>
-          <a:fillRef idx="3">
-            <a:schemeClr val="accent1"/>
-          </a:fillRef>
-          <a:effectRef idx="2">
-            <a:schemeClr val="accent1"/>
-          </a:effectRef>
-          <a:fontRef idx="minor">
-            <a:schemeClr val="lt1"/>
-          </a:fontRef>
-        </p:style>
-        <p:txBody>
-          <a:bodyPr rtlCol="0" anchor="ctr"/>
-          <a:lstStyle/>
-          <a:p>
-            <a:pPr algn="ctr"/>
-          </a:p>
-        </p:txBody>
-      </p:sp>
-      <p:sp>
-        <p:nvSpPr>
-          <p:cNvPr id="21" name="TextBox 20"/>
-          <p:cNvSpPr txBox="1"/>
-          <p:nvPr/>
-        </p:nvSpPr>
-        <p:spPr>
-          <a:xfrm>
-            <a:off x="700000" y="4060000"/>
-            <a:ext cx="550000" cy="550000"/>
-          </a:xfrm>
-          <a:prstGeom prst="rect">
-            <a:avLst/>
-          </a:prstGeom>
-          <a:noFill/>
-        </p:spPr>
-        <p:txBody>
-          <a:bodyPr wrap="square" anchor="ctr">
-            <a:spAutoFit/>
-          </a:bodyPr>
-          <a:lstStyle/>
-          <a:p>
-            <a:pPr algn="ctr"/>
-            <a:r>
-              <a:rPr sz="1400" b="1">
-                <a:solidFill>
-                  <a:srgbClr val="FFFFFF"/>
-                </a:solidFill>
-                <a:latin typeface="Open Sans"/>
-                <a:ea typeface="Open Sans"/>
-                <a:cs typeface="Open Sans"/>
-              </a:rPr>
-              <a:t>4</a:t>
-            </a:r>
-          </a:p>
-        </p:txBody>
-      </p:sp>
-      <p:sp>
-        <p:nvSpPr>
-          <p:cNvPr id="22" name="Rectangle 21"/>
-          <p:cNvSpPr/>
-          <p:nvPr/>
-        </p:nvSpPr>
-        <p:spPr>
-          <a:xfrm>
-            <a:off x="1450000" y="4060000"/>
-            <a:ext cx="10500000" cy="550000"/>
-          </a:xfrm>
-          <a:prstGeom prst="rect">
-            <a:avLst/>
-          </a:prstGeom>
-          <a:solidFill>
-            <a:srgbClr val="FFFFFF"/>
-          </a:solidFill>
-          <a:ln w="12700">
-            <a:solidFill>
-              <a:srgbClr val="999999"/>
-            </a:solidFill>
-          </a:ln>
-        </p:spPr>
-        <p:style>
-          <a:lnRef idx="1">
-            <a:schemeClr val="accent1"/>
-          </a:lnRef>
-          <a:fillRef idx="3">
-            <a:schemeClr val="accent1"/>
-          </a:fillRef>
-          <a:effectRef idx="2">
-            <a:schemeClr val="accent1"/>
-          </a:effectRef>
-          <a:fontRef idx="minor">
-            <a:schemeClr val="lt1"/>
-          </a:fontRef>
-        </p:style>
-        <p:txBody>
-          <a:bodyPr rtlCol="0" anchor="ctr"/>
-          <a:lstStyle/>
-          <a:p>
-            <a:pPr algn="ctr"/>
-          </a:p>
-        </p:txBody>
-      </p:sp>
-      <p:sp>
-        <p:nvSpPr>
-          <p:cNvPr id="23" name="TextBox 22"/>
-          <p:cNvSpPr txBox="1"/>
-          <p:nvPr/>
-        </p:nvSpPr>
-        <p:spPr>
-          <a:xfrm>
-            <a:off x="1650000" y="4060000"/>
-            <a:ext cx="10100000" cy="550000"/>
-          </a:xfrm>
-          <a:prstGeom prst="rect">
-            <a:avLst/>
-          </a:prstGeom>
-          <a:noFill/>
-        </p:spPr>
-        <p:txBody>
-          <a:bodyPr wrap="square" anchor="ctr">
-            <a:spAutoFit/>
-          </a:bodyPr>
-          <a:lstStyle/>
-          <a:p>
-            <a:pPr algn="l"/>
-            <a:r>
-              <a:rPr sz="1300" b="0">
-                <a:solidFill>
-                  <a:srgbClr val="333333"/>
-                </a:solidFill>
-                <a:latin typeface="Open Sans"/>
-                <a:ea typeface="Open Sans"/>
-                <a:cs typeface="Open Sans"/>
-              </a:rPr>
-              <a:t>Окажите помощь и обеспечьте покой.</a:t>
-            </a:r>
-          </a:p>
-        </p:txBody>
-      </p:sp>
-      <p:sp>
-        <p:nvSpPr>
-          <p:cNvPr id="24" name="Oval 23"/>
-          <p:cNvSpPr/>
-          <p:nvPr/>
-        </p:nvSpPr>
-        <p:spPr>
-          <a:xfrm>
-            <a:off x="700000" y="4930000"/>
-            <a:ext cx="550000" cy="550000"/>
-          </a:xfrm>
-          <a:prstGeom prst="ellipse">
-            <a:avLst/>
-          </a:prstGeom>
-          <a:solidFill>
-            <a:srgbClr val="555555"/>
-          </a:solidFill>
-          <a:ln>
-            <a:noFill/>
-          </a:ln>
-        </p:spPr>
-        <p:style>
-          <a:lnRef idx="1">
-            <a:schemeClr val="accent1"/>
-          </a:lnRef>
-          <a:fillRef idx="3">
-            <a:schemeClr val="accent1"/>
-          </a:fillRef>
-          <a:effectRef idx="2">
-            <a:schemeClr val="accent1"/>
-          </a:effectRef>
-          <a:fontRef idx="minor">
-            <a:schemeClr val="lt1"/>
-          </a:fontRef>
-        </p:style>
-        <p:txBody>
-          <a:bodyPr rtlCol="0" anchor="ctr"/>
-          <a:lstStyle/>
-          <a:p>
-            <a:pPr algn="ctr"/>
-          </a:p>
-        </p:txBody>
-      </p:sp>
-      <p:sp>
-        <p:nvSpPr>
-          <p:cNvPr id="25" name="TextBox 24"/>
-          <p:cNvSpPr txBox="1"/>
-          <p:nvPr/>
-        </p:nvSpPr>
-        <p:spPr>
-          <a:xfrm>
-            <a:off x="700000" y="4930000"/>
-            <a:ext cx="550000" cy="550000"/>
-          </a:xfrm>
-          <a:prstGeom prst="rect">
-            <a:avLst/>
-          </a:prstGeom>
-          <a:noFill/>
-        </p:spPr>
-        <p:txBody>
-          <a:bodyPr wrap="square" anchor="ctr">
-            <a:spAutoFit/>
-          </a:bodyPr>
-          <a:lstStyle/>
-          <a:p>
-            <a:pPr algn="ctr"/>
-            <a:r>
-              <a:rPr sz="1400" b="1">
-                <a:solidFill>
-                  <a:srgbClr val="FFFFFF"/>
-                </a:solidFill>
-                <a:latin typeface="Open Sans"/>
-                <a:ea typeface="Open Sans"/>
-                <a:cs typeface="Open Sans"/>
-              </a:rPr>
-              <a:t>5</a:t>
-            </a:r>
-          </a:p>
-        </p:txBody>
-      </p:sp>
-      <p:sp>
-        <p:nvSpPr>
-          <p:cNvPr id="26" name="Rectangle 25"/>
-          <p:cNvSpPr/>
-          <p:nvPr/>
-        </p:nvSpPr>
-        <p:spPr>
-          <a:xfrm>
-            <a:off x="1450000" y="4930000"/>
-            <a:ext cx="10500000" cy="550000"/>
-          </a:xfrm>
-          <a:prstGeom prst="rect">
-            <a:avLst/>
-          </a:prstGeom>
-          <a:solidFill>
-            <a:srgbClr val="FFFFFF"/>
-          </a:solidFill>
-          <a:ln w="12700">
-            <a:solidFill>
-              <a:srgbClr val="999999"/>
-            </a:solidFill>
-          </a:ln>
-        </p:spPr>
-        <p:style>
-          <a:lnRef idx="1">
-            <a:schemeClr val="accent1"/>
-          </a:lnRef>
-          <a:fillRef idx="3">
-            <a:schemeClr val="accent1"/>
-          </a:fillRef>
-          <a:effectRef idx="2">
-            <a:schemeClr val="accent1"/>
-          </a:effectRef>
-          <a:fontRef idx="minor">
-            <a:schemeClr val="lt1"/>
-          </a:fontRef>
-        </p:style>
-        <p:txBody>
-          <a:bodyPr rtlCol="0" anchor="ctr"/>
-          <a:lstStyle/>
-          <a:p>
-            <a:pPr algn="ctr"/>
-          </a:p>
-        </p:txBody>
-      </p:sp>
-      <p:sp>
-        <p:nvSpPr>
-          <p:cNvPr id="27" name="TextBox 26"/>
-          <p:cNvSpPr txBox="1"/>
-          <p:nvPr/>
-        </p:nvSpPr>
-        <p:spPr>
-          <a:xfrm>
-            <a:off x="1650000" y="4930000"/>
-            <a:ext cx="10100000" cy="550000"/>
-          </a:xfrm>
-          <a:prstGeom prst="rect">
-            <a:avLst/>
-          </a:prstGeom>
-          <a:noFill/>
-        </p:spPr>
-        <p:txBody>
-          <a:bodyPr wrap="square" anchor="ctr">
-            <a:spAutoFit/>
-          </a:bodyPr>
-          <a:lstStyle/>
-          <a:p>
-            <a:pPr algn="l"/>
-            <a:r>
-              <a:rPr sz="1300" b="0">
-                <a:solidFill>
-                  <a:srgbClr val="333333"/>
-                </a:solidFill>
-                <a:latin typeface="Open Sans"/>
-                <a:ea typeface="Open Sans"/>
-                <a:cs typeface="Open Sans"/>
-              </a:rPr>
-              <a:t>Контролируйте состояние до прибытия специалистов.</a:t>
+              <a:t>Не допускайте повторного укуса пострадавшего или помощника.</a:t>
             </a:r>
           </a:p>
         </p:txBody>
@@ -5867,7 +7054,7 @@
                 <a:ea typeface="Open Sans"/>
                 <a:cs typeface="Open Sans"/>
               </a:rPr>
-              <a:t>ПОМОЩЬ НА МЕСТЕ</a:t>
+              <a:t>ОБЩАЯ ПОСЛЕДОВАТЕЛЬНОСТЬ ДЕЙСТВИЙ</a:t>
             </a:r>
           </a:p>
         </p:txBody>
@@ -6034,133 +7221,20 @@
       </p:sp>
       <p:sp>
         <p:nvSpPr>
-          <p:cNvPr id="8" name="TextBox 7"/>
-          <p:cNvSpPr txBox="1"/>
-          <p:nvPr/>
-        </p:nvSpPr>
-        <p:spPr>
-          <a:xfrm>
-            <a:off x="700000" y="1500000"/>
-            <a:ext cx="11000000" cy="4200000"/>
-          </a:xfrm>
-          <a:prstGeom prst="rect">
-            <a:avLst/>
-          </a:prstGeom>
-          <a:noFill/>
-        </p:spPr>
-        <p:txBody>
-          <a:bodyPr wrap="square">
-            <a:spAutoFit/>
-          </a:bodyPr>
-          <a:lstStyle/>
-          <a:p>
-            <a:pPr algn="l">
-              <a:spcAft>
-                <a:spcPts val="800"/>
-              </a:spcAft>
-            </a:pPr>
-            <a:r>
-              <a:rPr sz="1400" b="0">
-                <a:solidFill>
-                  <a:srgbClr val="333333"/>
-                </a:solidFill>
-                <a:latin typeface="Open Sans"/>
-                <a:ea typeface="Open Sans"/>
-                <a:cs typeface="Open Sans"/>
-              </a:rPr>
-              <a:t>•  Уложите или усадите пострадавшего</a:t>
-            </a:r>
-          </a:p>
-          <a:p>
-            <a:pPr algn="l">
-              <a:spcAft>
-                <a:spcPts val="800"/>
-              </a:spcAft>
-            </a:pPr>
-            <a:r>
-              <a:rPr sz="1400" b="0">
-                <a:solidFill>
-                  <a:srgbClr val="333333"/>
-                </a:solidFill>
-                <a:latin typeface="Open Sans"/>
-                <a:ea typeface="Open Sans"/>
-                <a:cs typeface="Open Sans"/>
-              </a:rPr>
-              <a:t>•  Приложите холод через ткань</a:t>
-            </a:r>
-          </a:p>
-          <a:p>
-            <a:pPr algn="l">
-              <a:spcAft>
-                <a:spcPts val="800"/>
-              </a:spcAft>
-            </a:pPr>
-            <a:r>
-              <a:rPr sz="1400" b="0">
-                <a:solidFill>
-                  <a:srgbClr val="333333"/>
-                </a:solidFill>
-                <a:latin typeface="Open Sans"/>
-                <a:ea typeface="Open Sans"/>
-                <a:cs typeface="Open Sans"/>
-              </a:rPr>
-              <a:t>•  Ограничьте подвижность укушенной части тела</a:t>
-            </a:r>
-          </a:p>
-          <a:p>
-            <a:pPr algn="l">
-              <a:spcAft>
-                <a:spcPts val="800"/>
-              </a:spcAft>
-            </a:pPr>
-            <a:r>
-              <a:rPr sz="1400" b="0">
-                <a:solidFill>
-                  <a:srgbClr val="333333"/>
-                </a:solidFill>
-                <a:latin typeface="Open Sans"/>
-                <a:ea typeface="Open Sans"/>
-                <a:cs typeface="Open Sans"/>
-              </a:rPr>
-              <a:t>•  Снимите кольца и браслеты до появления отека</a:t>
-            </a:r>
-          </a:p>
-          <a:p>
-            <a:pPr algn="l">
-              <a:spcAft>
-                <a:spcPts val="800"/>
-              </a:spcAft>
-            </a:pPr>
-            <a:r>
-              <a:rPr sz="1400" b="0">
-                <a:solidFill>
-                  <a:srgbClr val="333333"/>
-                </a:solidFill>
-                <a:latin typeface="Open Sans"/>
-                <a:ea typeface="Open Sans"/>
-                <a:cs typeface="Open Sans"/>
-              </a:rPr>
-              <a:t>•  Отметьте время укуса или ужаливания</a:t>
-            </a:r>
-          </a:p>
-        </p:txBody>
-      </p:sp>
-      <p:sp>
-        <p:nvSpPr>
-          <p:cNvPr id="9" name="Rounded Rectangle 8"/>
+          <p:cNvPr id="8" name="Oval 7"/>
           <p:cNvSpPr/>
           <p:nvPr/>
         </p:nvSpPr>
         <p:spPr>
           <a:xfrm>
-            <a:off x="700000" y="5600000"/>
-            <a:ext cx="11000000" cy="1000000"/>
-          </a:xfrm>
-          <a:prstGeom prst="roundRect">
+            <a:off x="700000" y="1400000"/>
+            <a:ext cx="500000" cy="500000"/>
+          </a:xfrm>
+          <a:prstGeom prst="ellipse">
             <a:avLst/>
           </a:prstGeom>
           <a:solidFill>
-            <a:srgbClr val="F5F0E1"/>
+            <a:srgbClr val="CC0000"/>
           </a:solidFill>
           <a:ln>
             <a:noFill/>
@@ -6190,14 +7264,14 @@
       </p:sp>
       <p:sp>
         <p:nvSpPr>
-          <p:cNvPr id="10" name="TextBox 9"/>
+          <p:cNvPr id="9" name="TextBox 8"/>
           <p:cNvSpPr txBox="1"/>
           <p:nvPr/>
         </p:nvSpPr>
         <p:spPr>
           <a:xfrm>
-            <a:off x="950000" y="5800000"/>
-            <a:ext cx="10500000" cy="600000"/>
+            <a:off x="700000" y="1400000"/>
+            <a:ext cx="500000" cy="500000"/>
           </a:xfrm>
           <a:prstGeom prst="rect">
             <a:avLst/>
@@ -6210,17 +7284,909 @@
           </a:bodyPr>
           <a:lstStyle/>
           <a:p>
-            <a:pPr algn="l"/>
-            <a:r>
-              <a:rPr sz="1300" b="0">
-                <a:solidFill>
-                  <a:srgbClr val="333333"/>
+            <a:pPr algn="ctr"/>
+            <a:r>
+              <a:rPr sz="1300" b="1">
+                <a:solidFill>
+                  <a:srgbClr val="FFFFFF"/>
                 </a:solidFill>
                 <a:latin typeface="Open Sans"/>
                 <a:ea typeface="Open Sans"/>
                 <a:cs typeface="Open Sans"/>
               </a:rPr>
-              <a:t>Не разрезайте рану и не пытайтесь высасывать яд.</a:t>
+              <a:t>1</a:t>
+            </a:r>
+          </a:p>
+        </p:txBody>
+      </p:sp>
+      <p:sp>
+        <p:nvSpPr>
+          <p:cNvPr id="10" name="Rectangle 9"/>
+          <p:cNvSpPr/>
+          <p:nvPr/>
+        </p:nvSpPr>
+        <p:spPr>
+          <a:xfrm>
+            <a:off x="1400000" y="1400000"/>
+            <a:ext cx="10550000" cy="620000"/>
+          </a:xfrm>
+          <a:prstGeom prst="rect">
+            <a:avLst/>
+          </a:prstGeom>
+          <a:solidFill>
+            <a:srgbClr val="FFFFFF"/>
+          </a:solidFill>
+          <a:ln w="12700">
+            <a:solidFill>
+              <a:srgbClr val="999999"/>
+            </a:solidFill>
+          </a:ln>
+        </p:spPr>
+        <p:style>
+          <a:lnRef idx="1">
+            <a:schemeClr val="accent1"/>
+          </a:lnRef>
+          <a:fillRef idx="3">
+            <a:schemeClr val="accent1"/>
+          </a:fillRef>
+          <a:effectRef idx="2">
+            <a:schemeClr val="accent1"/>
+          </a:effectRef>
+          <a:fontRef idx="minor">
+            <a:schemeClr val="lt1"/>
+          </a:fontRef>
+        </p:style>
+        <p:txBody>
+          <a:bodyPr rtlCol="0" anchor="ctr"/>
+          <a:lstStyle/>
+          <a:p>
+            <a:pPr algn="ctr"/>
+          </a:p>
+        </p:txBody>
+      </p:sp>
+      <p:sp>
+        <p:nvSpPr>
+          <p:cNvPr id="11" name="TextBox 10"/>
+          <p:cNvSpPr txBox="1"/>
+          <p:nvPr/>
+        </p:nvSpPr>
+        <p:spPr>
+          <a:xfrm>
+            <a:off x="1600000" y="1400000"/>
+            <a:ext cx="10150000" cy="620000"/>
+          </a:xfrm>
+          <a:prstGeom prst="rect">
+            <a:avLst/>
+          </a:prstGeom>
+          <a:noFill/>
+        </p:spPr>
+        <p:txBody>
+          <a:bodyPr wrap="square" anchor="ctr">
+            <a:spAutoFit/>
+          </a:bodyPr>
+          <a:lstStyle/>
+          <a:p>
+            <a:pPr algn="l"/>
+            <a:r>
+              <a:rPr sz="1300" b="0">
+                <a:solidFill>
+                  <a:srgbClr val="333333"/>
+                </a:solidFill>
+                <a:latin typeface="Open Sans"/>
+                <a:ea typeface="Open Sans"/>
+                <a:cs typeface="Open Sans"/>
+              </a:rPr>
+              <a:t>Оцените сознание и нормальное дыхание.</a:t>
+            </a:r>
+          </a:p>
+        </p:txBody>
+      </p:sp>
+      <p:sp>
+        <p:nvSpPr>
+          <p:cNvPr id="12" name="Oval 11"/>
+          <p:cNvSpPr/>
+          <p:nvPr/>
+        </p:nvSpPr>
+        <p:spPr>
+          <a:xfrm>
+            <a:off x="700000" y="2100000"/>
+            <a:ext cx="500000" cy="500000"/>
+          </a:xfrm>
+          <a:prstGeom prst="ellipse">
+            <a:avLst/>
+          </a:prstGeom>
+          <a:solidFill>
+            <a:srgbClr val="555555"/>
+          </a:solidFill>
+          <a:ln>
+            <a:noFill/>
+          </a:ln>
+        </p:spPr>
+        <p:style>
+          <a:lnRef idx="1">
+            <a:schemeClr val="accent1"/>
+          </a:lnRef>
+          <a:fillRef idx="3">
+            <a:schemeClr val="accent1"/>
+          </a:fillRef>
+          <a:effectRef idx="2">
+            <a:schemeClr val="accent1"/>
+          </a:effectRef>
+          <a:fontRef idx="minor">
+            <a:schemeClr val="lt1"/>
+          </a:fontRef>
+        </p:style>
+        <p:txBody>
+          <a:bodyPr rtlCol="0" anchor="ctr"/>
+          <a:lstStyle/>
+          <a:p>
+            <a:pPr algn="ctr"/>
+          </a:p>
+        </p:txBody>
+      </p:sp>
+      <p:sp>
+        <p:nvSpPr>
+          <p:cNvPr id="13" name="TextBox 12"/>
+          <p:cNvSpPr txBox="1"/>
+          <p:nvPr/>
+        </p:nvSpPr>
+        <p:spPr>
+          <a:xfrm>
+            <a:off x="700000" y="2100000"/>
+            <a:ext cx="500000" cy="500000"/>
+          </a:xfrm>
+          <a:prstGeom prst="rect">
+            <a:avLst/>
+          </a:prstGeom>
+          <a:noFill/>
+        </p:spPr>
+        <p:txBody>
+          <a:bodyPr wrap="square" anchor="ctr">
+            <a:spAutoFit/>
+          </a:bodyPr>
+          <a:lstStyle/>
+          <a:p>
+            <a:pPr algn="ctr"/>
+            <a:r>
+              <a:rPr sz="1300" b="1">
+                <a:solidFill>
+                  <a:srgbClr val="FFFFFF"/>
+                </a:solidFill>
+                <a:latin typeface="Open Sans"/>
+                <a:ea typeface="Open Sans"/>
+                <a:cs typeface="Open Sans"/>
+              </a:rPr>
+              <a:t>2</a:t>
+            </a:r>
+          </a:p>
+        </p:txBody>
+      </p:sp>
+      <p:sp>
+        <p:nvSpPr>
+          <p:cNvPr id="14" name="Rectangle 13"/>
+          <p:cNvSpPr/>
+          <p:nvPr/>
+        </p:nvSpPr>
+        <p:spPr>
+          <a:xfrm>
+            <a:off x="1400000" y="2100000"/>
+            <a:ext cx="10550000" cy="620000"/>
+          </a:xfrm>
+          <a:prstGeom prst="rect">
+            <a:avLst/>
+          </a:prstGeom>
+          <a:solidFill>
+            <a:srgbClr val="FFFFFF"/>
+          </a:solidFill>
+          <a:ln w="12700">
+            <a:solidFill>
+              <a:srgbClr val="999999"/>
+            </a:solidFill>
+          </a:ln>
+        </p:spPr>
+        <p:style>
+          <a:lnRef idx="1">
+            <a:schemeClr val="accent1"/>
+          </a:lnRef>
+          <a:fillRef idx="3">
+            <a:schemeClr val="accent1"/>
+          </a:fillRef>
+          <a:effectRef idx="2">
+            <a:schemeClr val="accent1"/>
+          </a:effectRef>
+          <a:fontRef idx="minor">
+            <a:schemeClr val="lt1"/>
+          </a:fontRef>
+        </p:style>
+        <p:txBody>
+          <a:bodyPr rtlCol="0" anchor="ctr"/>
+          <a:lstStyle/>
+          <a:p>
+            <a:pPr algn="ctr"/>
+          </a:p>
+        </p:txBody>
+      </p:sp>
+      <p:sp>
+        <p:nvSpPr>
+          <p:cNvPr id="15" name="TextBox 14"/>
+          <p:cNvSpPr txBox="1"/>
+          <p:nvPr/>
+        </p:nvSpPr>
+        <p:spPr>
+          <a:xfrm>
+            <a:off x="1600000" y="2100000"/>
+            <a:ext cx="10150000" cy="620000"/>
+          </a:xfrm>
+          <a:prstGeom prst="rect">
+            <a:avLst/>
+          </a:prstGeom>
+          <a:noFill/>
+        </p:spPr>
+        <p:txBody>
+          <a:bodyPr wrap="square" anchor="ctr">
+            <a:spAutoFit/>
+          </a:bodyPr>
+          <a:lstStyle/>
+          <a:p>
+            <a:pPr algn="l"/>
+            <a:r>
+              <a:rPr sz="1300" b="0">
+                <a:solidFill>
+                  <a:srgbClr val="333333"/>
+                </a:solidFill>
+                <a:latin typeface="Open Sans"/>
+                <a:ea typeface="Open Sans"/>
+                <a:cs typeface="Open Sans"/>
+              </a:rPr>
+              <a:t>Вызовите скорую медицинскую помощь.</a:t>
+            </a:r>
+          </a:p>
+        </p:txBody>
+      </p:sp>
+      <p:sp>
+        <p:nvSpPr>
+          <p:cNvPr id="16" name="Oval 15"/>
+          <p:cNvSpPr/>
+          <p:nvPr/>
+        </p:nvSpPr>
+        <p:spPr>
+          <a:xfrm>
+            <a:off x="700000" y="2800000"/>
+            <a:ext cx="500000" cy="500000"/>
+          </a:xfrm>
+          <a:prstGeom prst="ellipse">
+            <a:avLst/>
+          </a:prstGeom>
+          <a:solidFill>
+            <a:srgbClr val="555555"/>
+          </a:solidFill>
+          <a:ln>
+            <a:noFill/>
+          </a:ln>
+        </p:spPr>
+        <p:style>
+          <a:lnRef idx="1">
+            <a:schemeClr val="accent1"/>
+          </a:lnRef>
+          <a:fillRef idx="3">
+            <a:schemeClr val="accent1"/>
+          </a:fillRef>
+          <a:effectRef idx="2">
+            <a:schemeClr val="accent1"/>
+          </a:effectRef>
+          <a:fontRef idx="minor">
+            <a:schemeClr val="lt1"/>
+          </a:fontRef>
+        </p:style>
+        <p:txBody>
+          <a:bodyPr rtlCol="0" anchor="ctr"/>
+          <a:lstStyle/>
+          <a:p>
+            <a:pPr algn="ctr"/>
+          </a:p>
+        </p:txBody>
+      </p:sp>
+      <p:sp>
+        <p:nvSpPr>
+          <p:cNvPr id="17" name="TextBox 16"/>
+          <p:cNvSpPr txBox="1"/>
+          <p:nvPr/>
+        </p:nvSpPr>
+        <p:spPr>
+          <a:xfrm>
+            <a:off x="700000" y="2800000"/>
+            <a:ext cx="500000" cy="500000"/>
+          </a:xfrm>
+          <a:prstGeom prst="rect">
+            <a:avLst/>
+          </a:prstGeom>
+          <a:noFill/>
+        </p:spPr>
+        <p:txBody>
+          <a:bodyPr wrap="square" anchor="ctr">
+            <a:spAutoFit/>
+          </a:bodyPr>
+          <a:lstStyle/>
+          <a:p>
+            <a:pPr algn="ctr"/>
+            <a:r>
+              <a:rPr sz="1300" b="1">
+                <a:solidFill>
+                  <a:srgbClr val="FFFFFF"/>
+                </a:solidFill>
+                <a:latin typeface="Open Sans"/>
+                <a:ea typeface="Open Sans"/>
+                <a:cs typeface="Open Sans"/>
+              </a:rPr>
+              <a:t>3</a:t>
+            </a:r>
+          </a:p>
+        </p:txBody>
+      </p:sp>
+      <p:sp>
+        <p:nvSpPr>
+          <p:cNvPr id="18" name="Rectangle 17"/>
+          <p:cNvSpPr/>
+          <p:nvPr/>
+        </p:nvSpPr>
+        <p:spPr>
+          <a:xfrm>
+            <a:off x="1400000" y="2800000"/>
+            <a:ext cx="10550000" cy="620000"/>
+          </a:xfrm>
+          <a:prstGeom prst="rect">
+            <a:avLst/>
+          </a:prstGeom>
+          <a:solidFill>
+            <a:srgbClr val="FFFFFF"/>
+          </a:solidFill>
+          <a:ln w="12700">
+            <a:solidFill>
+              <a:srgbClr val="999999"/>
+            </a:solidFill>
+          </a:ln>
+        </p:spPr>
+        <p:style>
+          <a:lnRef idx="1">
+            <a:schemeClr val="accent1"/>
+          </a:lnRef>
+          <a:fillRef idx="3">
+            <a:schemeClr val="accent1"/>
+          </a:fillRef>
+          <a:effectRef idx="2">
+            <a:schemeClr val="accent1"/>
+          </a:effectRef>
+          <a:fontRef idx="minor">
+            <a:schemeClr val="lt1"/>
+          </a:fontRef>
+        </p:style>
+        <p:txBody>
+          <a:bodyPr rtlCol="0" anchor="ctr"/>
+          <a:lstStyle/>
+          <a:p>
+            <a:pPr algn="ctr"/>
+          </a:p>
+        </p:txBody>
+      </p:sp>
+      <p:sp>
+        <p:nvSpPr>
+          <p:cNvPr id="19" name="TextBox 18"/>
+          <p:cNvSpPr txBox="1"/>
+          <p:nvPr/>
+        </p:nvSpPr>
+        <p:spPr>
+          <a:xfrm>
+            <a:off x="1600000" y="2800000"/>
+            <a:ext cx="10150000" cy="620000"/>
+          </a:xfrm>
+          <a:prstGeom prst="rect">
+            <a:avLst/>
+          </a:prstGeom>
+          <a:noFill/>
+        </p:spPr>
+        <p:txBody>
+          <a:bodyPr wrap="square" anchor="ctr">
+            <a:spAutoFit/>
+          </a:bodyPr>
+          <a:lstStyle/>
+          <a:p>
+            <a:pPr algn="l"/>
+            <a:r>
+              <a:rPr sz="1300" b="0">
+                <a:solidFill>
+                  <a:srgbClr val="333333"/>
+                </a:solidFill>
+                <a:latin typeface="Open Sans"/>
+                <a:ea typeface="Open Sans"/>
+                <a:cs typeface="Open Sans"/>
+              </a:rPr>
+              <a:t>Осмотрите место укуса, отметьте боль, отек и изменение цвета.</a:t>
+            </a:r>
+          </a:p>
+        </p:txBody>
+      </p:sp>
+      <p:sp>
+        <p:nvSpPr>
+          <p:cNvPr id="20" name="Oval 19"/>
+          <p:cNvSpPr/>
+          <p:nvPr/>
+        </p:nvSpPr>
+        <p:spPr>
+          <a:xfrm>
+            <a:off x="700000" y="3500000"/>
+            <a:ext cx="500000" cy="500000"/>
+          </a:xfrm>
+          <a:prstGeom prst="ellipse">
+            <a:avLst/>
+          </a:prstGeom>
+          <a:solidFill>
+            <a:srgbClr val="555555"/>
+          </a:solidFill>
+          <a:ln>
+            <a:noFill/>
+          </a:ln>
+        </p:spPr>
+        <p:style>
+          <a:lnRef idx="1">
+            <a:schemeClr val="accent1"/>
+          </a:lnRef>
+          <a:fillRef idx="3">
+            <a:schemeClr val="accent1"/>
+          </a:fillRef>
+          <a:effectRef idx="2">
+            <a:schemeClr val="accent1"/>
+          </a:effectRef>
+          <a:fontRef idx="minor">
+            <a:schemeClr val="lt1"/>
+          </a:fontRef>
+        </p:style>
+        <p:txBody>
+          <a:bodyPr rtlCol="0" anchor="ctr"/>
+          <a:lstStyle/>
+          <a:p>
+            <a:pPr algn="ctr"/>
+          </a:p>
+        </p:txBody>
+      </p:sp>
+      <p:sp>
+        <p:nvSpPr>
+          <p:cNvPr id="21" name="TextBox 20"/>
+          <p:cNvSpPr txBox="1"/>
+          <p:nvPr/>
+        </p:nvSpPr>
+        <p:spPr>
+          <a:xfrm>
+            <a:off x="700000" y="3500000"/>
+            <a:ext cx="500000" cy="500000"/>
+          </a:xfrm>
+          <a:prstGeom prst="rect">
+            <a:avLst/>
+          </a:prstGeom>
+          <a:noFill/>
+        </p:spPr>
+        <p:txBody>
+          <a:bodyPr wrap="square" anchor="ctr">
+            <a:spAutoFit/>
+          </a:bodyPr>
+          <a:lstStyle/>
+          <a:p>
+            <a:pPr algn="ctr"/>
+            <a:r>
+              <a:rPr sz="1300" b="1">
+                <a:solidFill>
+                  <a:srgbClr val="FFFFFF"/>
+                </a:solidFill>
+                <a:latin typeface="Open Sans"/>
+                <a:ea typeface="Open Sans"/>
+                <a:cs typeface="Open Sans"/>
+              </a:rPr>
+              <a:t>4</a:t>
+            </a:r>
+          </a:p>
+        </p:txBody>
+      </p:sp>
+      <p:sp>
+        <p:nvSpPr>
+          <p:cNvPr id="22" name="Rectangle 21"/>
+          <p:cNvSpPr/>
+          <p:nvPr/>
+        </p:nvSpPr>
+        <p:spPr>
+          <a:xfrm>
+            <a:off x="1400000" y="3500000"/>
+            <a:ext cx="10550000" cy="620000"/>
+          </a:xfrm>
+          <a:prstGeom prst="rect">
+            <a:avLst/>
+          </a:prstGeom>
+          <a:solidFill>
+            <a:srgbClr val="FFFFFF"/>
+          </a:solidFill>
+          <a:ln w="12700">
+            <a:solidFill>
+              <a:srgbClr val="999999"/>
+            </a:solidFill>
+          </a:ln>
+        </p:spPr>
+        <p:style>
+          <a:lnRef idx="1">
+            <a:schemeClr val="accent1"/>
+          </a:lnRef>
+          <a:fillRef idx="3">
+            <a:schemeClr val="accent1"/>
+          </a:fillRef>
+          <a:effectRef idx="2">
+            <a:schemeClr val="accent1"/>
+          </a:effectRef>
+          <a:fontRef idx="minor">
+            <a:schemeClr val="lt1"/>
+          </a:fontRef>
+        </p:style>
+        <p:txBody>
+          <a:bodyPr rtlCol="0" anchor="ctr"/>
+          <a:lstStyle/>
+          <a:p>
+            <a:pPr algn="ctr"/>
+          </a:p>
+        </p:txBody>
+      </p:sp>
+      <p:sp>
+        <p:nvSpPr>
+          <p:cNvPr id="23" name="TextBox 22"/>
+          <p:cNvSpPr txBox="1"/>
+          <p:nvPr/>
+        </p:nvSpPr>
+        <p:spPr>
+          <a:xfrm>
+            <a:off x="1600000" y="3500000"/>
+            <a:ext cx="10150000" cy="620000"/>
+          </a:xfrm>
+          <a:prstGeom prst="rect">
+            <a:avLst/>
+          </a:prstGeom>
+          <a:noFill/>
+        </p:spPr>
+        <p:txBody>
+          <a:bodyPr wrap="square" anchor="ctr">
+            <a:spAutoFit/>
+          </a:bodyPr>
+          <a:lstStyle/>
+          <a:p>
+            <a:pPr algn="l"/>
+            <a:r>
+              <a:rPr sz="1300" b="0">
+                <a:solidFill>
+                  <a:srgbClr val="333333"/>
+                </a:solidFill>
+                <a:latin typeface="Open Sans"/>
+                <a:ea typeface="Open Sans"/>
+                <a:cs typeface="Open Sans"/>
+              </a:rPr>
+              <a:t>Уточните время, вид животного или насекомого и прежние аллергические реакции.</a:t>
+            </a:r>
+          </a:p>
+        </p:txBody>
+      </p:sp>
+      <p:sp>
+        <p:nvSpPr>
+          <p:cNvPr id="24" name="Oval 23"/>
+          <p:cNvSpPr/>
+          <p:nvPr/>
+        </p:nvSpPr>
+        <p:spPr>
+          <a:xfrm>
+            <a:off x="700000" y="4200000"/>
+            <a:ext cx="500000" cy="500000"/>
+          </a:xfrm>
+          <a:prstGeom prst="ellipse">
+            <a:avLst/>
+          </a:prstGeom>
+          <a:solidFill>
+            <a:srgbClr val="555555"/>
+          </a:solidFill>
+          <a:ln>
+            <a:noFill/>
+          </a:ln>
+        </p:spPr>
+        <p:style>
+          <a:lnRef idx="1">
+            <a:schemeClr val="accent1"/>
+          </a:lnRef>
+          <a:fillRef idx="3">
+            <a:schemeClr val="accent1"/>
+          </a:fillRef>
+          <a:effectRef idx="2">
+            <a:schemeClr val="accent1"/>
+          </a:effectRef>
+          <a:fontRef idx="minor">
+            <a:schemeClr val="lt1"/>
+          </a:fontRef>
+        </p:style>
+        <p:txBody>
+          <a:bodyPr rtlCol="0" anchor="ctr"/>
+          <a:lstStyle/>
+          <a:p>
+            <a:pPr algn="ctr"/>
+          </a:p>
+        </p:txBody>
+      </p:sp>
+      <p:sp>
+        <p:nvSpPr>
+          <p:cNvPr id="25" name="TextBox 24"/>
+          <p:cNvSpPr txBox="1"/>
+          <p:nvPr/>
+        </p:nvSpPr>
+        <p:spPr>
+          <a:xfrm>
+            <a:off x="700000" y="4200000"/>
+            <a:ext cx="500000" cy="500000"/>
+          </a:xfrm>
+          <a:prstGeom prst="rect">
+            <a:avLst/>
+          </a:prstGeom>
+          <a:noFill/>
+        </p:spPr>
+        <p:txBody>
+          <a:bodyPr wrap="square" anchor="ctr">
+            <a:spAutoFit/>
+          </a:bodyPr>
+          <a:lstStyle/>
+          <a:p>
+            <a:pPr algn="ctr"/>
+            <a:r>
+              <a:rPr sz="1300" b="1">
+                <a:solidFill>
+                  <a:srgbClr val="FFFFFF"/>
+                </a:solidFill>
+                <a:latin typeface="Open Sans"/>
+                <a:ea typeface="Open Sans"/>
+                <a:cs typeface="Open Sans"/>
+              </a:rPr>
+              <a:t>5</a:t>
+            </a:r>
+          </a:p>
+        </p:txBody>
+      </p:sp>
+      <p:sp>
+        <p:nvSpPr>
+          <p:cNvPr id="26" name="Rectangle 25"/>
+          <p:cNvSpPr/>
+          <p:nvPr/>
+        </p:nvSpPr>
+        <p:spPr>
+          <a:xfrm>
+            <a:off x="1400000" y="4200000"/>
+            <a:ext cx="10550000" cy="620000"/>
+          </a:xfrm>
+          <a:prstGeom prst="rect">
+            <a:avLst/>
+          </a:prstGeom>
+          <a:solidFill>
+            <a:srgbClr val="FFFFFF"/>
+          </a:solidFill>
+          <a:ln w="12700">
+            <a:solidFill>
+              <a:srgbClr val="999999"/>
+            </a:solidFill>
+          </a:ln>
+        </p:spPr>
+        <p:style>
+          <a:lnRef idx="1">
+            <a:schemeClr val="accent1"/>
+          </a:lnRef>
+          <a:fillRef idx="3">
+            <a:schemeClr val="accent1"/>
+          </a:fillRef>
+          <a:effectRef idx="2">
+            <a:schemeClr val="accent1"/>
+          </a:effectRef>
+          <a:fontRef idx="minor">
+            <a:schemeClr val="lt1"/>
+          </a:fontRef>
+        </p:style>
+        <p:txBody>
+          <a:bodyPr rtlCol="0" anchor="ctr"/>
+          <a:lstStyle/>
+          <a:p>
+            <a:pPr algn="ctr"/>
+          </a:p>
+        </p:txBody>
+      </p:sp>
+      <p:sp>
+        <p:nvSpPr>
+          <p:cNvPr id="27" name="TextBox 26"/>
+          <p:cNvSpPr txBox="1"/>
+          <p:nvPr/>
+        </p:nvSpPr>
+        <p:spPr>
+          <a:xfrm>
+            <a:off x="1600000" y="4200000"/>
+            <a:ext cx="10150000" cy="620000"/>
+          </a:xfrm>
+          <a:prstGeom prst="rect">
+            <a:avLst/>
+          </a:prstGeom>
+          <a:noFill/>
+        </p:spPr>
+        <p:txBody>
+          <a:bodyPr wrap="square" anchor="ctr">
+            <a:spAutoFit/>
+          </a:bodyPr>
+          <a:lstStyle/>
+          <a:p>
+            <a:pPr algn="l"/>
+            <a:r>
+              <a:rPr sz="1300" b="0">
+                <a:solidFill>
+                  <a:srgbClr val="333333"/>
+                </a:solidFill>
+                <a:latin typeface="Open Sans"/>
+                <a:ea typeface="Open Sans"/>
+                <a:cs typeface="Open Sans"/>
+              </a:rPr>
+              <a:t>Обеспечьте покой, приложите холод и ограничьте движения конечности.</a:t>
+            </a:r>
+          </a:p>
+        </p:txBody>
+      </p:sp>
+      <p:sp>
+        <p:nvSpPr>
+          <p:cNvPr id="28" name="Oval 27"/>
+          <p:cNvSpPr/>
+          <p:nvPr/>
+        </p:nvSpPr>
+        <p:spPr>
+          <a:xfrm>
+            <a:off x="700000" y="4900000"/>
+            <a:ext cx="500000" cy="500000"/>
+          </a:xfrm>
+          <a:prstGeom prst="ellipse">
+            <a:avLst/>
+          </a:prstGeom>
+          <a:solidFill>
+            <a:srgbClr val="555555"/>
+          </a:solidFill>
+          <a:ln>
+            <a:noFill/>
+          </a:ln>
+        </p:spPr>
+        <p:style>
+          <a:lnRef idx="1">
+            <a:schemeClr val="accent1"/>
+          </a:lnRef>
+          <a:fillRef idx="3">
+            <a:schemeClr val="accent1"/>
+          </a:fillRef>
+          <a:effectRef idx="2">
+            <a:schemeClr val="accent1"/>
+          </a:effectRef>
+          <a:fontRef idx="minor">
+            <a:schemeClr val="lt1"/>
+          </a:fontRef>
+        </p:style>
+        <p:txBody>
+          <a:bodyPr rtlCol="0" anchor="ctr"/>
+          <a:lstStyle/>
+          <a:p>
+            <a:pPr algn="ctr"/>
+          </a:p>
+        </p:txBody>
+      </p:sp>
+      <p:sp>
+        <p:nvSpPr>
+          <p:cNvPr id="29" name="TextBox 28"/>
+          <p:cNvSpPr txBox="1"/>
+          <p:nvPr/>
+        </p:nvSpPr>
+        <p:spPr>
+          <a:xfrm>
+            <a:off x="700000" y="4900000"/>
+            <a:ext cx="500000" cy="500000"/>
+          </a:xfrm>
+          <a:prstGeom prst="rect">
+            <a:avLst/>
+          </a:prstGeom>
+          <a:noFill/>
+        </p:spPr>
+        <p:txBody>
+          <a:bodyPr wrap="square" anchor="ctr">
+            <a:spAutoFit/>
+          </a:bodyPr>
+          <a:lstStyle/>
+          <a:p>
+            <a:pPr algn="ctr"/>
+            <a:r>
+              <a:rPr sz="1300" b="1">
+                <a:solidFill>
+                  <a:srgbClr val="FFFFFF"/>
+                </a:solidFill>
+                <a:latin typeface="Open Sans"/>
+                <a:ea typeface="Open Sans"/>
+                <a:cs typeface="Open Sans"/>
+              </a:rPr>
+              <a:t>6</a:t>
+            </a:r>
+          </a:p>
+        </p:txBody>
+      </p:sp>
+      <p:sp>
+        <p:nvSpPr>
+          <p:cNvPr id="30" name="Rectangle 29"/>
+          <p:cNvSpPr/>
+          <p:nvPr/>
+        </p:nvSpPr>
+        <p:spPr>
+          <a:xfrm>
+            <a:off x="1400000" y="4900000"/>
+            <a:ext cx="10550000" cy="620000"/>
+          </a:xfrm>
+          <a:prstGeom prst="rect">
+            <a:avLst/>
+          </a:prstGeom>
+          <a:solidFill>
+            <a:srgbClr val="FFFFFF"/>
+          </a:solidFill>
+          <a:ln w="12700">
+            <a:solidFill>
+              <a:srgbClr val="999999"/>
+            </a:solidFill>
+          </a:ln>
+        </p:spPr>
+        <p:style>
+          <a:lnRef idx="1">
+            <a:schemeClr val="accent1"/>
+          </a:lnRef>
+          <a:fillRef idx="3">
+            <a:schemeClr val="accent1"/>
+          </a:fillRef>
+          <a:effectRef idx="2">
+            <a:schemeClr val="accent1"/>
+          </a:effectRef>
+          <a:fontRef idx="minor">
+            <a:schemeClr val="lt1"/>
+          </a:fontRef>
+        </p:style>
+        <p:txBody>
+          <a:bodyPr rtlCol="0" anchor="ctr"/>
+          <a:lstStyle/>
+          <a:p>
+            <a:pPr algn="ctr"/>
+          </a:p>
+        </p:txBody>
+      </p:sp>
+      <p:sp>
+        <p:nvSpPr>
+          <p:cNvPr id="31" name="TextBox 30"/>
+          <p:cNvSpPr txBox="1"/>
+          <p:nvPr/>
+        </p:nvSpPr>
+        <p:spPr>
+          <a:xfrm>
+            <a:off x="1600000" y="4900000"/>
+            <a:ext cx="10150000" cy="620000"/>
+          </a:xfrm>
+          <a:prstGeom prst="rect">
+            <a:avLst/>
+          </a:prstGeom>
+          <a:noFill/>
+        </p:spPr>
+        <p:txBody>
+          <a:bodyPr wrap="square" anchor="ctr">
+            <a:spAutoFit/>
+          </a:bodyPr>
+          <a:lstStyle/>
+          <a:p>
+            <a:pPr algn="l"/>
+            <a:r>
+              <a:rPr sz="1300" b="0">
+                <a:solidFill>
+                  <a:srgbClr val="333333"/>
+                </a:solidFill>
+                <a:latin typeface="Open Sans"/>
+                <a:ea typeface="Open Sans"/>
+                <a:cs typeface="Open Sans"/>
+              </a:rPr>
+              <a:t>Наблюдайте за состоянием до передачи специалистам.</a:t>
             </a:r>
           </a:p>
         </p:txBody>
@@ -6318,7 +8284,7 @@
                 <a:ea typeface="Open Sans"/>
                 <a:cs typeface="Open Sans"/>
               </a:rPr>
-              <a:t>ПРИЗНАКИ УХУДШЕНИЯ</a:t>
+              <a:t>ХОЛОД НА МЕСТО ПОВРЕЖДЕНИЯ</a:t>
             </a:r>
           </a:p>
         </p:txBody>
@@ -6491,8 +8457,8 @@
         </p:nvSpPr>
         <p:spPr>
           <a:xfrm>
-            <a:off x="700000" y="1500000"/>
-            <a:ext cx="11000000" cy="4200000"/>
+            <a:off x="700000" y="1450000"/>
+            <a:ext cx="11000000" cy="4000000"/>
           </a:xfrm>
           <a:prstGeom prst="rect">
             <a:avLst/>
@@ -6519,7 +8485,7 @@
                 <a:ea typeface="Open Sans"/>
                 <a:cs typeface="Open Sans"/>
               </a:rPr>
-              <a:t>•  Быстро нарастающий отек</a:t>
+              <a:t>•  Оберните холодный пакет тканью, чтобы не повредить кожу.</a:t>
             </a:r>
           </a:p>
           <a:p>
@@ -6529,15 +8495,15 @@
               </a:spcAft>
             </a:pPr>
             <a:r>
-              <a:rPr sz="1400" b="1">
-                <a:solidFill>
-                  <a:srgbClr val="CC0000"/>
+              <a:rPr sz="1400" b="0">
+                <a:solidFill>
+                  <a:srgbClr val="333333"/>
                 </a:solidFill>
                 <a:latin typeface="Open Sans"/>
                 <a:ea typeface="Open Sans"/>
                 <a:cs typeface="Open Sans"/>
               </a:rPr>
-              <a:t>•  Сыпь по всему телу</a:t>
+              <a:t>•  Прикладывайте к области укуса или ужаливания с перерывами.</a:t>
             </a:r>
           </a:p>
           <a:p>
@@ -6547,15 +8513,15 @@
               </a:spcAft>
             </a:pPr>
             <a:r>
-              <a:rPr sz="1400" b="1">
-                <a:solidFill>
-                  <a:srgbClr val="CC0000"/>
+              <a:rPr sz="1400" b="0">
+                <a:solidFill>
+                  <a:srgbClr val="333333"/>
                 </a:solidFill>
                 <a:latin typeface="Open Sans"/>
                 <a:ea typeface="Open Sans"/>
                 <a:cs typeface="Open Sans"/>
               </a:rPr>
-              <a:t>•  Осиплость или затрудненное дыхание</a:t>
+              <a:t>•  Холод уменьшает боль, отек и скорость местных процессов.</a:t>
             </a:r>
           </a:p>
           <a:p>
@@ -6565,15 +8531,15 @@
               </a:spcAft>
             </a:pPr>
             <a:r>
-              <a:rPr sz="1400" b="1">
-                <a:solidFill>
-                  <a:srgbClr val="CC0000"/>
+              <a:rPr sz="1400" b="0">
+                <a:solidFill>
+                  <a:srgbClr val="333333"/>
                 </a:solidFill>
                 <a:latin typeface="Open Sans"/>
                 <a:ea typeface="Open Sans"/>
                 <a:cs typeface="Open Sans"/>
               </a:rPr>
-              <a:t>•  Резкая слабость или потеря сознания</a:t>
+              <a:t>•  Не прижимайте пакет чрезмерно и не нарушайте кровообращение.</a:t>
             </a:r>
           </a:p>
           <a:p>
@@ -6583,15 +8549,95 @@
               </a:spcAft>
             </a:pPr>
             <a:r>
-              <a:rPr sz="1400" b="1">
-                <a:solidFill>
-                  <a:srgbClr val="CC0000"/>
+              <a:rPr sz="1400" b="0">
+                <a:solidFill>
+                  <a:srgbClr val="333333"/>
                 </a:solidFill>
                 <a:latin typeface="Open Sans"/>
                 <a:ea typeface="Open Sans"/>
                 <a:cs typeface="Open Sans"/>
               </a:rPr>
-              <a:t>•  Судороги</a:t>
+              <a:t>•  Следите за цветом, чувствительностью и температурой кожи.</a:t>
+            </a:r>
+          </a:p>
+        </p:txBody>
+      </p:sp>
+      <p:sp>
+        <p:nvSpPr>
+          <p:cNvPr id="9" name="Rounded Rectangle 8"/>
+          <p:cNvSpPr/>
+          <p:nvPr/>
+        </p:nvSpPr>
+        <p:spPr>
+          <a:xfrm>
+            <a:off x="700000" y="5600000"/>
+            <a:ext cx="11000000" cy="1000000"/>
+          </a:xfrm>
+          <a:prstGeom prst="roundRect">
+            <a:avLst/>
+          </a:prstGeom>
+          <a:solidFill>
+            <a:srgbClr val="F5F0E1"/>
+          </a:solidFill>
+          <a:ln>
+            <a:noFill/>
+          </a:ln>
+        </p:spPr>
+        <p:style>
+          <a:lnRef idx="1">
+            <a:schemeClr val="accent1"/>
+          </a:lnRef>
+          <a:fillRef idx="3">
+            <a:schemeClr val="accent1"/>
+          </a:fillRef>
+          <a:effectRef idx="2">
+            <a:schemeClr val="accent1"/>
+          </a:effectRef>
+          <a:fontRef idx="minor">
+            <a:schemeClr val="lt1"/>
+          </a:fontRef>
+        </p:style>
+        <p:txBody>
+          <a:bodyPr rtlCol="0" anchor="ctr"/>
+          <a:lstStyle/>
+          <a:p>
+            <a:pPr algn="ctr"/>
+          </a:p>
+        </p:txBody>
+      </p:sp>
+      <p:sp>
+        <p:nvSpPr>
+          <p:cNvPr id="10" name="TextBox 9"/>
+          <p:cNvSpPr txBox="1"/>
+          <p:nvPr/>
+        </p:nvSpPr>
+        <p:spPr>
+          <a:xfrm>
+            <a:off x="950000" y="5800000"/>
+            <a:ext cx="10500000" cy="600000"/>
+          </a:xfrm>
+          <a:prstGeom prst="rect">
+            <a:avLst/>
+          </a:prstGeom>
+          <a:noFill/>
+        </p:spPr>
+        <p:txBody>
+          <a:bodyPr wrap="square" anchor="ctr">
+            <a:spAutoFit/>
+          </a:bodyPr>
+          <a:lstStyle/>
+          <a:p>
+            <a:pPr algn="l"/>
+            <a:r>
+              <a:rPr sz="1200" b="0">
+                <a:solidFill>
+                  <a:srgbClr val="333333"/>
+                </a:solidFill>
+                <a:latin typeface="Open Sans"/>
+                <a:ea typeface="Open Sans"/>
+                <a:cs typeface="Open Sans"/>
+              </a:rPr>
+              <a:t>Лед нельзя прикладывать непосредственно к коже.</a:t>
             </a:r>
           </a:p>
         </p:txBody>
@@ -6689,7 +8735,7 @@
                 <a:ea typeface="Open Sans"/>
                 <a:cs typeface="Open Sans"/>
               </a:rPr>
-              <a:t>ГЛАВНОЕ ЗАПОМНИТЬ</a:t>
+              <a:t>ПОКОЙ И ОГРАНИЧЕНИЕ ДВИЖЕНИЙ</a:t>
             </a:r>
           </a:p>
         </p:txBody>
@@ -6856,25 +8902,136 @@
       </p:sp>
       <p:sp>
         <p:nvSpPr>
-          <p:cNvPr id="8" name="Rectangle 7"/>
+          <p:cNvPr id="8" name="TextBox 7"/>
+          <p:cNvSpPr txBox="1"/>
+          <p:nvPr/>
+        </p:nvSpPr>
+        <p:spPr>
+          <a:xfrm>
+            <a:off x="700000" y="1450000"/>
+            <a:ext cx="11000000" cy="4000000"/>
+          </a:xfrm>
+          <a:prstGeom prst="rect">
+            <a:avLst/>
+          </a:prstGeom>
+          <a:noFill/>
+        </p:spPr>
+        <p:txBody>
+          <a:bodyPr wrap="square">
+            <a:spAutoFit/>
+          </a:bodyPr>
+          <a:lstStyle/>
+          <a:p>
+            <a:pPr algn="l">
+              <a:spcAft>
+                <a:spcPts val="800"/>
+              </a:spcAft>
+            </a:pPr>
+            <a:r>
+              <a:rPr sz="1400" b="0">
+                <a:solidFill>
+                  <a:srgbClr val="333333"/>
+                </a:solidFill>
+                <a:latin typeface="Open Sans"/>
+                <a:ea typeface="Open Sans"/>
+                <a:cs typeface="Open Sans"/>
+              </a:rPr>
+              <a:t>•  Уложите или усадите человека и объясните необходимость покоя.</a:t>
+            </a:r>
+          </a:p>
+          <a:p>
+            <a:pPr algn="l">
+              <a:spcAft>
+                <a:spcPts val="800"/>
+              </a:spcAft>
+            </a:pPr>
+            <a:r>
+              <a:rPr sz="1400" b="0">
+                <a:solidFill>
+                  <a:srgbClr val="333333"/>
+                </a:solidFill>
+                <a:latin typeface="Open Sans"/>
+                <a:ea typeface="Open Sans"/>
+                <a:cs typeface="Open Sans"/>
+              </a:rPr>
+              <a:t>•  Поврежденной конечности придайте удобное устойчивое положение.</a:t>
+            </a:r>
+          </a:p>
+          <a:p>
+            <a:pPr algn="l">
+              <a:spcAft>
+                <a:spcPts val="800"/>
+              </a:spcAft>
+            </a:pPr>
+            <a:r>
+              <a:rPr sz="1400" b="0">
+                <a:solidFill>
+                  <a:srgbClr val="333333"/>
+                </a:solidFill>
+                <a:latin typeface="Open Sans"/>
+                <a:ea typeface="Open Sans"/>
+                <a:cs typeface="Open Sans"/>
+              </a:rPr>
+              <a:t>•  Снимите кольца, браслеты, часы и тесную обувь до появления выраженного отека.</a:t>
+            </a:r>
+          </a:p>
+          <a:p>
+            <a:pPr algn="l">
+              <a:spcAft>
+                <a:spcPts val="800"/>
+              </a:spcAft>
+            </a:pPr>
+            <a:r>
+              <a:rPr sz="1400" b="0">
+                <a:solidFill>
+                  <a:srgbClr val="333333"/>
+                </a:solidFill>
+                <a:latin typeface="Open Sans"/>
+                <a:ea typeface="Open Sans"/>
+                <a:cs typeface="Open Sans"/>
+              </a:rPr>
+              <a:t>•  По возможности обездвижьте конечность без тугого перетягивания.</a:t>
+            </a:r>
+          </a:p>
+          <a:p>
+            <a:pPr algn="l">
+              <a:spcAft>
+                <a:spcPts val="800"/>
+              </a:spcAft>
+            </a:pPr>
+            <a:r>
+              <a:rPr sz="1400" b="0">
+                <a:solidFill>
+                  <a:srgbClr val="333333"/>
+                </a:solidFill>
+                <a:latin typeface="Open Sans"/>
+                <a:ea typeface="Open Sans"/>
+                <a:cs typeface="Open Sans"/>
+              </a:rPr>
+              <a:t>•  Не позволяйте пострадавшему идти или активно двигать поврежденной частью.</a:t>
+            </a:r>
+          </a:p>
+        </p:txBody>
+      </p:sp>
+      <p:sp>
+        <p:nvSpPr>
+          <p:cNvPr id="9" name="Rounded Rectangle 8"/>
           <p:cNvSpPr/>
           <p:nvPr/>
         </p:nvSpPr>
         <p:spPr>
           <a:xfrm>
-            <a:off x="700000" y="1450000"/>
-            <a:ext cx="11000000" cy="850000"/>
-          </a:xfrm>
-          <a:prstGeom prst="rect">
+            <a:off x="700000" y="5600000"/>
+            <a:ext cx="11000000" cy="1000000"/>
+          </a:xfrm>
+          <a:prstGeom prst="roundRect">
             <a:avLst/>
           </a:prstGeom>
           <a:solidFill>
-            <a:srgbClr val="FFFFFF"/>
+            <a:srgbClr val="F5F0E1"/>
           </a:solidFill>
-          <a:ln w="12700">
-            <a:solidFill>
-              <a:srgbClr val="999999"/>
-            </a:solidFill>
+          <a:ln>
+            <a:noFill/>
           </a:ln>
         </p:spPr>
         <p:style>
@@ -6901,57 +9058,14 @@
       </p:sp>
       <p:sp>
         <p:nvSpPr>
-          <p:cNvPr id="9" name="Rectangle 8"/>
-          <p:cNvSpPr/>
-          <p:nvPr/>
-        </p:nvSpPr>
-        <p:spPr>
-          <a:xfrm>
-            <a:off x="700000" y="1450000"/>
-            <a:ext cx="90000" cy="850000"/>
-          </a:xfrm>
-          <a:prstGeom prst="rect">
-            <a:avLst/>
-          </a:prstGeom>
-          <a:solidFill>
-            <a:srgbClr val="CC0000"/>
-          </a:solidFill>
-          <a:ln>
-            <a:noFill/>
-          </a:ln>
-        </p:spPr>
-        <p:style>
-          <a:lnRef idx="1">
-            <a:schemeClr val="accent1"/>
-          </a:lnRef>
-          <a:fillRef idx="3">
-            <a:schemeClr val="accent1"/>
-          </a:fillRef>
-          <a:effectRef idx="2">
-            <a:schemeClr val="accent1"/>
-          </a:effectRef>
-          <a:fontRef idx="minor">
-            <a:schemeClr val="lt1"/>
-          </a:fontRef>
-        </p:style>
-        <p:txBody>
-          <a:bodyPr rtlCol="0" anchor="ctr"/>
-          <a:lstStyle/>
-          <a:p>
-            <a:pPr algn="ctr"/>
-          </a:p>
-        </p:txBody>
-      </p:sp>
-      <p:sp>
-        <p:nvSpPr>
           <p:cNvPr id="10" name="TextBox 9"/>
           <p:cNvSpPr txBox="1"/>
           <p:nvPr/>
         </p:nvSpPr>
         <p:spPr>
           <a:xfrm>
-            <a:off x="1000000" y="1550000"/>
-            <a:ext cx="10400000" cy="650000"/>
+            <a:off x="950000" y="5800000"/>
+            <a:ext cx="10500000" cy="600000"/>
           </a:xfrm>
           <a:prstGeom prst="rect">
             <a:avLst/>
@@ -6966,7 +9080,7 @@
           <a:p>
             <a:pPr algn="l"/>
             <a:r>
-              <a:rPr sz="1300" b="0">
+              <a:rPr sz="1200" b="0">
                 <a:solidFill>
                   <a:srgbClr val="333333"/>
                 </a:solidFill>
@@ -6974,507 +9088,7 @@
                 <a:ea typeface="Open Sans"/>
                 <a:cs typeface="Open Sans"/>
               </a:rPr>
-              <a:t>Не приближайтесь к источнику опасности</a:t>
-            </a:r>
-          </a:p>
-        </p:txBody>
-      </p:sp>
-      <p:sp>
-        <p:nvSpPr>
-          <p:cNvPr id="11" name="Rectangle 10"/>
-          <p:cNvSpPr/>
-          <p:nvPr/>
-        </p:nvSpPr>
-        <p:spPr>
-          <a:xfrm>
-            <a:off x="700000" y="2400000"/>
-            <a:ext cx="11000000" cy="850000"/>
-          </a:xfrm>
-          <a:prstGeom prst="rect">
-            <a:avLst/>
-          </a:prstGeom>
-          <a:solidFill>
-            <a:srgbClr val="FFFFFF"/>
-          </a:solidFill>
-          <a:ln w="12700">
-            <a:solidFill>
-              <a:srgbClr val="999999"/>
-            </a:solidFill>
-          </a:ln>
-        </p:spPr>
-        <p:style>
-          <a:lnRef idx="1">
-            <a:schemeClr val="accent1"/>
-          </a:lnRef>
-          <a:fillRef idx="3">
-            <a:schemeClr val="accent1"/>
-          </a:fillRef>
-          <a:effectRef idx="2">
-            <a:schemeClr val="accent1"/>
-          </a:effectRef>
-          <a:fontRef idx="minor">
-            <a:schemeClr val="lt1"/>
-          </a:fontRef>
-        </p:style>
-        <p:txBody>
-          <a:bodyPr rtlCol="0" anchor="ctr"/>
-          <a:lstStyle/>
-          <a:p>
-            <a:pPr algn="ctr"/>
-          </a:p>
-        </p:txBody>
-      </p:sp>
-      <p:sp>
-        <p:nvSpPr>
-          <p:cNvPr id="12" name="Rectangle 11"/>
-          <p:cNvSpPr/>
-          <p:nvPr/>
-        </p:nvSpPr>
-        <p:spPr>
-          <a:xfrm>
-            <a:off x="700000" y="2400000"/>
-            <a:ext cx="90000" cy="850000"/>
-          </a:xfrm>
-          <a:prstGeom prst="rect">
-            <a:avLst/>
-          </a:prstGeom>
-          <a:solidFill>
-            <a:srgbClr val="CC0000"/>
-          </a:solidFill>
-          <a:ln>
-            <a:noFill/>
-          </a:ln>
-        </p:spPr>
-        <p:style>
-          <a:lnRef idx="1">
-            <a:schemeClr val="accent1"/>
-          </a:lnRef>
-          <a:fillRef idx="3">
-            <a:schemeClr val="accent1"/>
-          </a:fillRef>
-          <a:effectRef idx="2">
-            <a:schemeClr val="accent1"/>
-          </a:effectRef>
-          <a:fontRef idx="minor">
-            <a:schemeClr val="lt1"/>
-          </a:fontRef>
-        </p:style>
-        <p:txBody>
-          <a:bodyPr rtlCol="0" anchor="ctr"/>
-          <a:lstStyle/>
-          <a:p>
-            <a:pPr algn="ctr"/>
-          </a:p>
-        </p:txBody>
-      </p:sp>
-      <p:sp>
-        <p:nvSpPr>
-          <p:cNvPr id="13" name="TextBox 12"/>
-          <p:cNvSpPr txBox="1"/>
-          <p:nvPr/>
-        </p:nvSpPr>
-        <p:spPr>
-          <a:xfrm>
-            <a:off x="1000000" y="2500000"/>
-            <a:ext cx="10400000" cy="650000"/>
-          </a:xfrm>
-          <a:prstGeom prst="rect">
-            <a:avLst/>
-          </a:prstGeom>
-          <a:noFill/>
-        </p:spPr>
-        <p:txBody>
-          <a:bodyPr wrap="square" anchor="ctr">
-            <a:spAutoFit/>
-          </a:bodyPr>
-          <a:lstStyle/>
-          <a:p>
-            <a:pPr algn="l"/>
-            <a:r>
-              <a:rPr sz="1300" b="0">
-                <a:solidFill>
-                  <a:srgbClr val="333333"/>
-                </a:solidFill>
-                <a:latin typeface="Open Sans"/>
-                <a:ea typeface="Open Sans"/>
-                <a:cs typeface="Open Sans"/>
-              </a:rPr>
-              <a:t>Вызовите скорую помощь</a:t>
-            </a:r>
-          </a:p>
-        </p:txBody>
-      </p:sp>
-      <p:sp>
-        <p:nvSpPr>
-          <p:cNvPr id="14" name="Rectangle 13"/>
-          <p:cNvSpPr/>
-          <p:nvPr/>
-        </p:nvSpPr>
-        <p:spPr>
-          <a:xfrm>
-            <a:off x="700000" y="3350000"/>
-            <a:ext cx="11000000" cy="850000"/>
-          </a:xfrm>
-          <a:prstGeom prst="rect">
-            <a:avLst/>
-          </a:prstGeom>
-          <a:solidFill>
-            <a:srgbClr val="FFFFFF"/>
-          </a:solidFill>
-          <a:ln w="12700">
-            <a:solidFill>
-              <a:srgbClr val="999999"/>
-            </a:solidFill>
-          </a:ln>
-        </p:spPr>
-        <p:style>
-          <a:lnRef idx="1">
-            <a:schemeClr val="accent1"/>
-          </a:lnRef>
-          <a:fillRef idx="3">
-            <a:schemeClr val="accent1"/>
-          </a:fillRef>
-          <a:effectRef idx="2">
-            <a:schemeClr val="accent1"/>
-          </a:effectRef>
-          <a:fontRef idx="minor">
-            <a:schemeClr val="lt1"/>
-          </a:fontRef>
-        </p:style>
-        <p:txBody>
-          <a:bodyPr rtlCol="0" anchor="ctr"/>
-          <a:lstStyle/>
-          <a:p>
-            <a:pPr algn="ctr"/>
-          </a:p>
-        </p:txBody>
-      </p:sp>
-      <p:sp>
-        <p:nvSpPr>
-          <p:cNvPr id="15" name="Rectangle 14"/>
-          <p:cNvSpPr/>
-          <p:nvPr/>
-        </p:nvSpPr>
-        <p:spPr>
-          <a:xfrm>
-            <a:off x="700000" y="3350000"/>
-            <a:ext cx="90000" cy="850000"/>
-          </a:xfrm>
-          <a:prstGeom prst="rect">
-            <a:avLst/>
-          </a:prstGeom>
-          <a:solidFill>
-            <a:srgbClr val="CC0000"/>
-          </a:solidFill>
-          <a:ln>
-            <a:noFill/>
-          </a:ln>
-        </p:spPr>
-        <p:style>
-          <a:lnRef idx="1">
-            <a:schemeClr val="accent1"/>
-          </a:lnRef>
-          <a:fillRef idx="3">
-            <a:schemeClr val="accent1"/>
-          </a:fillRef>
-          <a:effectRef idx="2">
-            <a:schemeClr val="accent1"/>
-          </a:effectRef>
-          <a:fontRef idx="minor">
-            <a:schemeClr val="lt1"/>
-          </a:fontRef>
-        </p:style>
-        <p:txBody>
-          <a:bodyPr rtlCol="0" anchor="ctr"/>
-          <a:lstStyle/>
-          <a:p>
-            <a:pPr algn="ctr"/>
-          </a:p>
-        </p:txBody>
-      </p:sp>
-      <p:sp>
-        <p:nvSpPr>
-          <p:cNvPr id="16" name="TextBox 15"/>
-          <p:cNvSpPr txBox="1"/>
-          <p:nvPr/>
-        </p:nvSpPr>
-        <p:spPr>
-          <a:xfrm>
-            <a:off x="1000000" y="3450000"/>
-            <a:ext cx="10400000" cy="650000"/>
-          </a:xfrm>
-          <a:prstGeom prst="rect">
-            <a:avLst/>
-          </a:prstGeom>
-          <a:noFill/>
-        </p:spPr>
-        <p:txBody>
-          <a:bodyPr wrap="square" anchor="ctr">
-            <a:spAutoFit/>
-          </a:bodyPr>
-          <a:lstStyle/>
-          <a:p>
-            <a:pPr algn="l"/>
-            <a:r>
-              <a:rPr sz="1300" b="0">
-                <a:solidFill>
-                  <a:srgbClr val="333333"/>
-                </a:solidFill>
-                <a:latin typeface="Open Sans"/>
-                <a:ea typeface="Open Sans"/>
-                <a:cs typeface="Open Sans"/>
-              </a:rPr>
-              <a:t>Приложите холод через ткань</a:t>
-            </a:r>
-          </a:p>
-        </p:txBody>
-      </p:sp>
-      <p:sp>
-        <p:nvSpPr>
-          <p:cNvPr id="17" name="Rectangle 16"/>
-          <p:cNvSpPr/>
-          <p:nvPr/>
-        </p:nvSpPr>
-        <p:spPr>
-          <a:xfrm>
-            <a:off x="700000" y="4300000"/>
-            <a:ext cx="11000000" cy="850000"/>
-          </a:xfrm>
-          <a:prstGeom prst="rect">
-            <a:avLst/>
-          </a:prstGeom>
-          <a:solidFill>
-            <a:srgbClr val="FFFFFF"/>
-          </a:solidFill>
-          <a:ln w="12700">
-            <a:solidFill>
-              <a:srgbClr val="999999"/>
-            </a:solidFill>
-          </a:ln>
-        </p:spPr>
-        <p:style>
-          <a:lnRef idx="1">
-            <a:schemeClr val="accent1"/>
-          </a:lnRef>
-          <a:fillRef idx="3">
-            <a:schemeClr val="accent1"/>
-          </a:fillRef>
-          <a:effectRef idx="2">
-            <a:schemeClr val="accent1"/>
-          </a:effectRef>
-          <a:fontRef idx="minor">
-            <a:schemeClr val="lt1"/>
-          </a:fontRef>
-        </p:style>
-        <p:txBody>
-          <a:bodyPr rtlCol="0" anchor="ctr"/>
-          <a:lstStyle/>
-          <a:p>
-            <a:pPr algn="ctr"/>
-          </a:p>
-        </p:txBody>
-      </p:sp>
-      <p:sp>
-        <p:nvSpPr>
-          <p:cNvPr id="18" name="Rectangle 17"/>
-          <p:cNvSpPr/>
-          <p:nvPr/>
-        </p:nvSpPr>
-        <p:spPr>
-          <a:xfrm>
-            <a:off x="700000" y="4300000"/>
-            <a:ext cx="90000" cy="850000"/>
-          </a:xfrm>
-          <a:prstGeom prst="rect">
-            <a:avLst/>
-          </a:prstGeom>
-          <a:solidFill>
-            <a:srgbClr val="CC0000"/>
-          </a:solidFill>
-          <a:ln>
-            <a:noFill/>
-          </a:ln>
-        </p:spPr>
-        <p:style>
-          <a:lnRef idx="1">
-            <a:schemeClr val="accent1"/>
-          </a:lnRef>
-          <a:fillRef idx="3">
-            <a:schemeClr val="accent1"/>
-          </a:fillRef>
-          <a:effectRef idx="2">
-            <a:schemeClr val="accent1"/>
-          </a:effectRef>
-          <a:fontRef idx="minor">
-            <a:schemeClr val="lt1"/>
-          </a:fontRef>
-        </p:style>
-        <p:txBody>
-          <a:bodyPr rtlCol="0" anchor="ctr"/>
-          <a:lstStyle/>
-          <a:p>
-            <a:pPr algn="ctr"/>
-          </a:p>
-        </p:txBody>
-      </p:sp>
-      <p:sp>
-        <p:nvSpPr>
-          <p:cNvPr id="19" name="TextBox 18"/>
-          <p:cNvSpPr txBox="1"/>
-          <p:nvPr/>
-        </p:nvSpPr>
-        <p:spPr>
-          <a:xfrm>
-            <a:off x="1000000" y="4400000"/>
-            <a:ext cx="10400000" cy="650000"/>
-          </a:xfrm>
-          <a:prstGeom prst="rect">
-            <a:avLst/>
-          </a:prstGeom>
-          <a:noFill/>
-        </p:spPr>
-        <p:txBody>
-          <a:bodyPr wrap="square" anchor="ctr">
-            <a:spAutoFit/>
-          </a:bodyPr>
-          <a:lstStyle/>
-          <a:p>
-            <a:pPr algn="l"/>
-            <a:r>
-              <a:rPr sz="1300" b="0">
-                <a:solidFill>
-                  <a:srgbClr val="333333"/>
-                </a:solidFill>
-                <a:latin typeface="Open Sans"/>
-                <a:ea typeface="Open Sans"/>
-                <a:cs typeface="Open Sans"/>
-              </a:rPr>
-              <a:t>Ограничьте движение укушенной части</a:t>
-            </a:r>
-          </a:p>
-        </p:txBody>
-      </p:sp>
-      <p:sp>
-        <p:nvSpPr>
-          <p:cNvPr id="20" name="Rectangle 19"/>
-          <p:cNvSpPr/>
-          <p:nvPr/>
-        </p:nvSpPr>
-        <p:spPr>
-          <a:xfrm>
-            <a:off x="700000" y="5250000"/>
-            <a:ext cx="11000000" cy="850000"/>
-          </a:xfrm>
-          <a:prstGeom prst="rect">
-            <a:avLst/>
-          </a:prstGeom>
-          <a:solidFill>
-            <a:srgbClr val="FFFFFF"/>
-          </a:solidFill>
-          <a:ln w="12700">
-            <a:solidFill>
-              <a:srgbClr val="999999"/>
-            </a:solidFill>
-          </a:ln>
-        </p:spPr>
-        <p:style>
-          <a:lnRef idx="1">
-            <a:schemeClr val="accent1"/>
-          </a:lnRef>
-          <a:fillRef idx="3">
-            <a:schemeClr val="accent1"/>
-          </a:fillRef>
-          <a:effectRef idx="2">
-            <a:schemeClr val="accent1"/>
-          </a:effectRef>
-          <a:fontRef idx="minor">
-            <a:schemeClr val="lt1"/>
-          </a:fontRef>
-        </p:style>
-        <p:txBody>
-          <a:bodyPr rtlCol="0" anchor="ctr"/>
-          <a:lstStyle/>
-          <a:p>
-            <a:pPr algn="ctr"/>
-          </a:p>
-        </p:txBody>
-      </p:sp>
-      <p:sp>
-        <p:nvSpPr>
-          <p:cNvPr id="21" name="Rectangle 20"/>
-          <p:cNvSpPr/>
-          <p:nvPr/>
-        </p:nvSpPr>
-        <p:spPr>
-          <a:xfrm>
-            <a:off x="700000" y="5250000"/>
-            <a:ext cx="90000" cy="850000"/>
-          </a:xfrm>
-          <a:prstGeom prst="rect">
-            <a:avLst/>
-          </a:prstGeom>
-          <a:solidFill>
-            <a:srgbClr val="CC0000"/>
-          </a:solidFill>
-          <a:ln>
-            <a:noFill/>
-          </a:ln>
-        </p:spPr>
-        <p:style>
-          <a:lnRef idx="1">
-            <a:schemeClr val="accent1"/>
-          </a:lnRef>
-          <a:fillRef idx="3">
-            <a:schemeClr val="accent1"/>
-          </a:fillRef>
-          <a:effectRef idx="2">
-            <a:schemeClr val="accent1"/>
-          </a:effectRef>
-          <a:fontRef idx="minor">
-            <a:schemeClr val="lt1"/>
-          </a:fontRef>
-        </p:style>
-        <p:txBody>
-          <a:bodyPr rtlCol="0" anchor="ctr"/>
-          <a:lstStyle/>
-          <a:p>
-            <a:pPr algn="ctr"/>
-          </a:p>
-        </p:txBody>
-      </p:sp>
-      <p:sp>
-        <p:nvSpPr>
-          <p:cNvPr id="22" name="TextBox 21"/>
-          <p:cNvSpPr txBox="1"/>
-          <p:nvPr/>
-        </p:nvSpPr>
-        <p:spPr>
-          <a:xfrm>
-            <a:off x="1000000" y="5350000"/>
-            <a:ext cx="10400000" cy="650000"/>
-          </a:xfrm>
-          <a:prstGeom prst="rect">
-            <a:avLst/>
-          </a:prstGeom>
-          <a:noFill/>
-        </p:spPr>
-        <p:txBody>
-          <a:bodyPr wrap="square" anchor="ctr">
-            <a:spAutoFit/>
-          </a:bodyPr>
-          <a:lstStyle/>
-          <a:p>
-            <a:pPr algn="l"/>
-            <a:r>
-              <a:rPr sz="1300" b="0">
-                <a:solidFill>
-                  <a:srgbClr val="333333"/>
-                </a:solidFill>
-                <a:latin typeface="Open Sans"/>
-                <a:ea typeface="Open Sans"/>
-                <a:cs typeface="Open Sans"/>
-              </a:rPr>
-              <a:t>Следите за дыханием и сознанием</a:t>
+              <a:t>Движение усиливает кровообращение и может ускорить распространение вещества.</a:t>
             </a:r>
           </a:p>
         </p:txBody>
@@ -7572,7 +9186,7 @@
                 <a:ea typeface="Open Sans"/>
                 <a:cs typeface="Open Sans"/>
               </a:rPr>
-              <a:t>ПАМЯТКА</a:t>
+              <a:t>ЧЕГО ДЕЛАТЬ НЕЛЬЗЯ</a:t>
             </a:r>
           </a:p>
         </p:txBody>
@@ -7737,30 +9351,119 @@
           </a:p>
         </p:txBody>
       </p:sp>
-      <p:pic>
-        <p:nvPicPr>
-          <p:cNvPr id="8" name="Picture 7" descr="pamyatka-tema4-ukusy-16x9.png"/>
-          <p:cNvPicPr>
-            <a:picLocks noChangeAspect="1"/>
-          </p:cNvPicPr>
-          <p:nvPr/>
-        </p:nvPicPr>
-        <p:blipFill>
-          <a:blip r:embed="rId2"/>
-          <a:stretch>
-            <a:fillRect/>
-          </a:stretch>
-        </p:blipFill>
-        <p:spPr>
-          <a:xfrm>
-            <a:off x="2300000" y="1400000"/>
-            <a:ext cx="7800000" cy="5200000"/>
-          </a:xfrm>
-          <a:prstGeom prst="rect">
-            <a:avLst/>
-          </a:prstGeom>
-        </p:spPr>
-      </p:pic>
+      <p:sp>
+        <p:nvSpPr>
+          <p:cNvPr id="8" name="TextBox 7"/>
+          <p:cNvSpPr txBox="1"/>
+          <p:nvPr/>
+        </p:nvSpPr>
+        <p:spPr>
+          <a:xfrm>
+            <a:off x="700000" y="1450000"/>
+            <a:ext cx="11000000" cy="4000000"/>
+          </a:xfrm>
+          <a:prstGeom prst="rect">
+            <a:avLst/>
+          </a:prstGeom>
+          <a:noFill/>
+        </p:spPr>
+        <p:txBody>
+          <a:bodyPr wrap="square">
+            <a:spAutoFit/>
+          </a:bodyPr>
+          <a:lstStyle/>
+          <a:p>
+            <a:pPr algn="l">
+              <a:spcAft>
+                <a:spcPts val="800"/>
+              </a:spcAft>
+            </a:pPr>
+            <a:r>
+              <a:rPr sz="1400" b="1">
+                <a:solidFill>
+                  <a:srgbClr val="CC0000"/>
+                </a:solidFill>
+                <a:latin typeface="Open Sans"/>
+                <a:ea typeface="Open Sans"/>
+                <a:cs typeface="Open Sans"/>
+              </a:rPr>
+              <a:t>•  Разрезать, прокалывать или прижигать место укуса</a:t>
+            </a:r>
+          </a:p>
+          <a:p>
+            <a:pPr algn="l">
+              <a:spcAft>
+                <a:spcPts val="800"/>
+              </a:spcAft>
+            </a:pPr>
+            <a:r>
+              <a:rPr sz="1400" b="1">
+                <a:solidFill>
+                  <a:srgbClr val="CC0000"/>
+                </a:solidFill>
+                <a:latin typeface="Open Sans"/>
+                <a:ea typeface="Open Sans"/>
+                <a:cs typeface="Open Sans"/>
+              </a:rPr>
+              <a:t>•  Высасывать яд ртом или выдавливать содержимое раны</a:t>
+            </a:r>
+          </a:p>
+          <a:p>
+            <a:pPr algn="l">
+              <a:spcAft>
+                <a:spcPts val="800"/>
+              </a:spcAft>
+            </a:pPr>
+            <a:r>
+              <a:rPr sz="1400" b="1">
+                <a:solidFill>
+                  <a:srgbClr val="CC0000"/>
+                </a:solidFill>
+                <a:latin typeface="Open Sans"/>
+                <a:ea typeface="Open Sans"/>
+                <a:cs typeface="Open Sans"/>
+              </a:rPr>
+              <a:t>•  Накладывать тугой жгут без показаний для остановки кровотечения</a:t>
+            </a:r>
+          </a:p>
+          <a:p>
+            <a:pPr algn="l">
+              <a:spcAft>
+                <a:spcPts val="800"/>
+              </a:spcAft>
+            </a:pPr>
+            <a:r>
+              <a:rPr sz="1400" b="1">
+                <a:solidFill>
+                  <a:srgbClr val="CC0000"/>
+                </a:solidFill>
+                <a:latin typeface="Open Sans"/>
+                <a:ea typeface="Open Sans"/>
+                <a:cs typeface="Open Sans"/>
+              </a:rPr>
+              <a:t>•  Растирать и активно массировать поврежденную область</a:t>
+            </a:r>
+          </a:p>
+          <a:p>
+            <a:pPr algn="l">
+              <a:spcAft>
+                <a:spcPts val="800"/>
+              </a:spcAft>
+            </a:pPr>
+            <a:r>
+              <a:rPr sz="1400" b="1">
+                <a:solidFill>
+                  <a:srgbClr val="CC0000"/>
+                </a:solidFill>
+                <a:latin typeface="Open Sans"/>
+                <a:ea typeface="Open Sans"/>
+                <a:cs typeface="Open Sans"/>
+              </a:rPr>
+              <a:t>•  Давать алкоголь, неизвестные лекарства или пищу человеку с ухудшением сознания</a:t>
+            </a:r>
+          </a:p>
+        </p:txBody>
+      </p:sp>
     </p:spTree>
   </p:cSld>
   <p:clrMapOvr>
@@ -7788,13 +9491,13 @@
         <p:spPr>
           <a:xfrm>
             <a:off x="0" y="0"/>
-            <a:ext cx="3400000" cy="6858000"/>
+            <a:ext cx="12191695" cy="6858000"/>
           </a:xfrm>
           <a:prstGeom prst="rect">
             <a:avLst/>
           </a:prstGeom>
           <a:solidFill>
-            <a:srgbClr val="DDDDDD"/>
+            <a:srgbClr val="FFFFFF"/>
           </a:solidFill>
           <a:ln>
             <a:noFill/>
@@ -7824,20 +9527,57 @@
       </p:sp>
       <p:sp>
         <p:nvSpPr>
-          <p:cNvPr id="3" name="Rectangle 2"/>
+          <p:cNvPr id="3" name="TextBox 2"/>
+          <p:cNvSpPr txBox="1"/>
+          <p:nvPr/>
+        </p:nvSpPr>
+        <p:spPr>
+          <a:xfrm>
+            <a:off x="700000" y="250000"/>
+            <a:ext cx="11200000" cy="550000"/>
+          </a:xfrm>
+          <a:prstGeom prst="rect">
+            <a:avLst/>
+          </a:prstGeom>
+          <a:noFill/>
+        </p:spPr>
+        <p:txBody>
+          <a:bodyPr wrap="square" anchor="t">
+            <a:spAutoFit/>
+          </a:bodyPr>
+          <a:lstStyle/>
+          <a:p>
+            <a:pPr algn="l"/>
+            <a:r>
+              <a:rPr sz="2200" b="1">
+                <a:solidFill>
+                  <a:srgbClr val="333333"/>
+                </a:solidFill>
+                <a:latin typeface="Open Sans"/>
+                <a:ea typeface="Open Sans"/>
+                <a:cs typeface="Open Sans"/>
+              </a:rPr>
+              <a:t>МЕСТНАЯ И ОБЩАЯ РЕАКЦИЯ</a:t>
+            </a:r>
+          </a:p>
+        </p:txBody>
+      </p:sp>
+      <p:sp>
+        <p:nvSpPr>
+          <p:cNvPr id="4" name="Rectangle 3"/>
           <p:cNvSpPr/>
           <p:nvPr/>
         </p:nvSpPr>
         <p:spPr>
           <a:xfrm>
-            <a:off x="3400000" y="0"/>
-            <a:ext cx="8800000" cy="6858000"/>
+            <a:off x="700000" y="850000"/>
+            <a:ext cx="9000000" cy="28000"/>
           </a:xfrm>
           <a:prstGeom prst="rect">
             <a:avLst/>
           </a:prstGeom>
           <a:solidFill>
-            <a:srgbClr val="F8F8F8"/>
+            <a:srgbClr val="555555"/>
           </a:solidFill>
           <a:ln>
             <a:noFill/>
@@ -7867,14 +9607,14 @@
       </p:sp>
       <p:sp>
         <p:nvSpPr>
-          <p:cNvPr id="4" name="TextBox 3"/>
+          <p:cNvPr id="5" name="TextBox 4"/>
           <p:cNvSpPr txBox="1"/>
           <p:nvPr/>
         </p:nvSpPr>
         <p:spPr>
           <a:xfrm>
-            <a:off x="4000000" y="3000000"/>
-            <a:ext cx="7500000" cy="1000000"/>
+            <a:off x="700000" y="920000"/>
+            <a:ext cx="11000000" cy="350000"/>
           </a:xfrm>
           <a:prstGeom prst="rect">
             <a:avLst/>
@@ -7882,42 +9622,42 @@
           <a:noFill/>
         </p:spPr>
         <p:txBody>
-          <a:bodyPr wrap="square" anchor="ctr">
+          <a:bodyPr wrap="square" anchor="t">
             <a:spAutoFit/>
           </a:bodyPr>
           <a:lstStyle/>
           <a:p>
             <a:pPr algn="l"/>
             <a:r>
-              <a:rPr sz="3000" b="1">
-                <a:solidFill>
-                  <a:srgbClr val="333333"/>
+              <a:rPr sz="1200" b="0">
+                <a:solidFill>
+                  <a:srgbClr val="666666"/>
                 </a:solidFill>
                 <a:latin typeface="Open Sans"/>
                 <a:ea typeface="Open Sans"/>
                 <a:cs typeface="Open Sans"/>
               </a:rPr>
-              <a:t>БЛАГОДАРИМ ЗА ВНИМАНИЕ</a:t>
-            </a:r>
-          </a:p>
-        </p:txBody>
-      </p:sp>
-      <p:sp>
-        <p:nvSpPr>
-          <p:cNvPr id="5" name="Rectangle 4"/>
+              <a:t>Оказание первой помощи при травмах, ранениях и поражениях, прочих состояниях</a:t>
+            </a:r>
+          </a:p>
+        </p:txBody>
+      </p:sp>
+      <p:sp>
+        <p:nvSpPr>
+          <p:cNvPr id="6" name="Rectangle 5"/>
           <p:cNvSpPr/>
           <p:nvPr/>
         </p:nvSpPr>
         <p:spPr>
           <a:xfrm>
-            <a:off x="4000000" y="4100000"/>
-            <a:ext cx="4500000" cy="30000"/>
+            <a:off x="0" y="2800000"/>
+            <a:ext cx="420000" cy="420000"/>
           </a:xfrm>
           <a:prstGeom prst="rect">
             <a:avLst/>
           </a:prstGeom>
           <a:solidFill>
-            <a:srgbClr val="333333"/>
+            <a:srgbClr val="555555"/>
           </a:solidFill>
           <a:ln>
             <a:noFill/>
@@ -7942,6 +9682,307 @@
           <a:lstStyle/>
           <a:p>
             <a:pPr algn="ctr"/>
+          </a:p>
+        </p:txBody>
+      </p:sp>
+      <p:sp>
+        <p:nvSpPr>
+          <p:cNvPr id="7" name="TextBox 6"/>
+          <p:cNvSpPr txBox="1"/>
+          <p:nvPr/>
+        </p:nvSpPr>
+        <p:spPr>
+          <a:xfrm>
+            <a:off x="0" y="2800000"/>
+            <a:ext cx="420000" cy="420000"/>
+          </a:xfrm>
+          <a:prstGeom prst="rect">
+            <a:avLst/>
+          </a:prstGeom>
+          <a:noFill/>
+        </p:spPr>
+        <p:txBody>
+          <a:bodyPr wrap="square" anchor="ctr">
+            <a:spAutoFit/>
+          </a:bodyPr>
+          <a:lstStyle/>
+          <a:p>
+            <a:pPr algn="ctr"/>
+            <a:r>
+              <a:rPr sz="1400" b="1">
+                <a:solidFill>
+                  <a:srgbClr val="FFFFFF"/>
+                </a:solidFill>
+                <a:latin typeface="Open Sans"/>
+                <a:ea typeface="Open Sans"/>
+                <a:cs typeface="Open Sans"/>
+              </a:rPr>
+              <a:t>9</a:t>
+            </a:r>
+          </a:p>
+        </p:txBody>
+      </p:sp>
+      <p:sp>
+        <p:nvSpPr>
+          <p:cNvPr id="8" name="TextBox 7"/>
+          <p:cNvSpPr txBox="1"/>
+          <p:nvPr/>
+        </p:nvSpPr>
+        <p:spPr>
+          <a:xfrm>
+            <a:off x="700000" y="1400000"/>
+            <a:ext cx="5400000" cy="400000"/>
+          </a:xfrm>
+          <a:prstGeom prst="rect">
+            <a:avLst/>
+          </a:prstGeom>
+          <a:noFill/>
+        </p:spPr>
+        <p:txBody>
+          <a:bodyPr wrap="square" anchor="t">
+            <a:spAutoFit/>
+          </a:bodyPr>
+          <a:lstStyle/>
+          <a:p>
+            <a:pPr algn="l"/>
+            <a:r>
+              <a:rPr sz="1400" b="1">
+                <a:solidFill>
+                  <a:srgbClr val="333333"/>
+                </a:solidFill>
+                <a:latin typeface="Open Sans"/>
+                <a:ea typeface="Open Sans"/>
+                <a:cs typeface="Open Sans"/>
+              </a:rPr>
+              <a:t>Местная</a:t>
+            </a:r>
+          </a:p>
+        </p:txBody>
+      </p:sp>
+      <p:sp>
+        <p:nvSpPr>
+          <p:cNvPr id="9" name="TextBox 8"/>
+          <p:cNvSpPr txBox="1"/>
+          <p:nvPr/>
+        </p:nvSpPr>
+        <p:spPr>
+          <a:xfrm>
+            <a:off x="6600000" y="1400000"/>
+            <a:ext cx="5400000" cy="400000"/>
+          </a:xfrm>
+          <a:prstGeom prst="rect">
+            <a:avLst/>
+          </a:prstGeom>
+          <a:noFill/>
+        </p:spPr>
+        <p:txBody>
+          <a:bodyPr wrap="square" anchor="t">
+            <a:spAutoFit/>
+          </a:bodyPr>
+          <a:lstStyle/>
+          <a:p>
+            <a:pPr algn="l"/>
+            <a:r>
+              <a:rPr sz="1400" b="1">
+                <a:solidFill>
+                  <a:srgbClr val="333333"/>
+                </a:solidFill>
+                <a:latin typeface="Open Sans"/>
+                <a:ea typeface="Open Sans"/>
+                <a:cs typeface="Open Sans"/>
+              </a:rPr>
+              <a:t>Общая</a:t>
+            </a:r>
+          </a:p>
+        </p:txBody>
+      </p:sp>
+      <p:sp>
+        <p:nvSpPr>
+          <p:cNvPr id="10" name="TextBox 9"/>
+          <p:cNvSpPr txBox="1"/>
+          <p:nvPr/>
+        </p:nvSpPr>
+        <p:spPr>
+          <a:xfrm>
+            <a:off x="700000" y="1850000"/>
+            <a:ext cx="5400000" cy="4000000"/>
+          </a:xfrm>
+          <a:prstGeom prst="rect">
+            <a:avLst/>
+          </a:prstGeom>
+          <a:noFill/>
+        </p:spPr>
+        <p:txBody>
+          <a:bodyPr wrap="square">
+            <a:spAutoFit/>
+          </a:bodyPr>
+          <a:lstStyle/>
+          <a:p>
+            <a:pPr algn="l">
+              <a:spcAft>
+                <a:spcPts val="800"/>
+              </a:spcAft>
+            </a:pPr>
+            <a:r>
+              <a:rPr sz="1300" b="0">
+                <a:solidFill>
+                  <a:srgbClr val="333333"/>
+                </a:solidFill>
+                <a:latin typeface="Open Sans"/>
+                <a:ea typeface="Open Sans"/>
+                <a:cs typeface="Open Sans"/>
+              </a:rPr>
+              <a:t>•  боль, жжение и зуд</a:t>
+            </a:r>
+          </a:p>
+          <a:p>
+            <a:pPr algn="l">
+              <a:spcAft>
+                <a:spcPts val="800"/>
+              </a:spcAft>
+            </a:pPr>
+            <a:r>
+              <a:rPr sz="1300" b="0">
+                <a:solidFill>
+                  <a:srgbClr val="333333"/>
+                </a:solidFill>
+                <a:latin typeface="Open Sans"/>
+                <a:ea typeface="Open Sans"/>
+                <a:cs typeface="Open Sans"/>
+              </a:rPr>
+              <a:t>•  покраснение и припухлость</a:t>
+            </a:r>
+          </a:p>
+          <a:p>
+            <a:pPr algn="l">
+              <a:spcAft>
+                <a:spcPts val="800"/>
+              </a:spcAft>
+            </a:pPr>
+            <a:r>
+              <a:rPr sz="1300" b="0">
+                <a:solidFill>
+                  <a:srgbClr val="333333"/>
+                </a:solidFill>
+                <a:latin typeface="Open Sans"/>
+                <a:ea typeface="Open Sans"/>
+                <a:cs typeface="Open Sans"/>
+              </a:rPr>
+              <a:t>•  следы зубов, жала или небольшая рана</a:t>
+            </a:r>
+          </a:p>
+          <a:p>
+            <a:pPr algn="l">
+              <a:spcAft>
+                <a:spcPts val="800"/>
+              </a:spcAft>
+            </a:pPr>
+            <a:r>
+              <a:rPr sz="1300" b="0">
+                <a:solidFill>
+                  <a:srgbClr val="333333"/>
+                </a:solidFill>
+                <a:latin typeface="Open Sans"/>
+                <a:ea typeface="Open Sans"/>
+                <a:cs typeface="Open Sans"/>
+              </a:rPr>
+              <a:t>•  постепенное увеличение отека</a:t>
+            </a:r>
+          </a:p>
+        </p:txBody>
+      </p:sp>
+      <p:sp>
+        <p:nvSpPr>
+          <p:cNvPr id="11" name="TextBox 10"/>
+          <p:cNvSpPr txBox="1"/>
+          <p:nvPr/>
+        </p:nvSpPr>
+        <p:spPr>
+          <a:xfrm>
+            <a:off x="6600000" y="1850000"/>
+            <a:ext cx="5400000" cy="4000000"/>
+          </a:xfrm>
+          <a:prstGeom prst="rect">
+            <a:avLst/>
+          </a:prstGeom>
+          <a:noFill/>
+        </p:spPr>
+        <p:txBody>
+          <a:bodyPr wrap="square">
+            <a:spAutoFit/>
+          </a:bodyPr>
+          <a:lstStyle/>
+          <a:p>
+            <a:pPr algn="l">
+              <a:spcAft>
+                <a:spcPts val="800"/>
+              </a:spcAft>
+            </a:pPr>
+            <a:r>
+              <a:rPr sz="1300" b="0">
+                <a:solidFill>
+                  <a:srgbClr val="333333"/>
+                </a:solidFill>
+                <a:latin typeface="Open Sans"/>
+                <a:ea typeface="Open Sans"/>
+                <a:cs typeface="Open Sans"/>
+              </a:rPr>
+              <a:t>•  слабость, тошнота и головокружение</a:t>
+            </a:r>
+          </a:p>
+          <a:p>
+            <a:pPr algn="l">
+              <a:spcAft>
+                <a:spcPts val="800"/>
+              </a:spcAft>
+            </a:pPr>
+            <a:r>
+              <a:rPr sz="1300" b="0">
+                <a:solidFill>
+                  <a:srgbClr val="333333"/>
+                </a:solidFill>
+                <a:latin typeface="Open Sans"/>
+                <a:ea typeface="Open Sans"/>
+                <a:cs typeface="Open Sans"/>
+              </a:rPr>
+              <a:t>•  распространенная сыпь и отек лица</a:t>
+            </a:r>
+          </a:p>
+          <a:p>
+            <a:pPr algn="l">
+              <a:spcAft>
+                <a:spcPts val="800"/>
+              </a:spcAft>
+            </a:pPr>
+            <a:r>
+              <a:rPr sz="1300" b="0">
+                <a:solidFill>
+                  <a:srgbClr val="333333"/>
+                </a:solidFill>
+                <a:latin typeface="Open Sans"/>
+                <a:ea typeface="Open Sans"/>
+                <a:cs typeface="Open Sans"/>
+              </a:rPr>
+              <a:t>•  осиплость, свистящее или затрудненное дыхание</a:t>
+            </a:r>
+          </a:p>
+          <a:p>
+            <a:pPr algn="l">
+              <a:spcAft>
+                <a:spcPts val="800"/>
+              </a:spcAft>
+            </a:pPr>
+            <a:r>
+              <a:rPr sz="1300" b="0">
+                <a:solidFill>
+                  <a:srgbClr val="333333"/>
+                </a:solidFill>
+                <a:latin typeface="Open Sans"/>
+                <a:ea typeface="Open Sans"/>
+                <a:cs typeface="Open Sans"/>
+              </a:rPr>
+              <a:t>•  судороги, спутанность или потеря сознания</a:t>
+            </a:r>
           </a:p>
         </p:txBody>
       </p:sp>
